--- a/20261014_Lステップとは_機能と費用感.pptx
+++ b/20261014_Lステップとは_機能と費用感.pptx
@@ -2720,7 +2720,7 @@
                 <a:latin typeface="メイリオ" panose="020B0604030504040204" pitchFamily="50" charset="-128"/>
                 <a:ea typeface="メイリオ" panose="020B0604030504040204" pitchFamily="50" charset="-128"/>
               </a:rPr>
-              <a:t>LINE公式アカウントの機能を拡張する、LINE専用のマーケティングツールです。</a:t>
+              <a:t>LINE公式アカウントの機能を拡張する、LINE専用のツールです。</a:t>
             </a:r>
             <a:endParaRPr lang="en-US" altLang="ja-JP" sz="1400" dirty="0">
               <a:solidFill>
@@ -2744,7 +2744,7 @@
                 <a:latin typeface="メイリオ" panose="020B0604030504040204" pitchFamily="50" charset="-128"/>
                 <a:ea typeface="メイリオ" panose="020B0604030504040204" pitchFamily="50" charset="-128"/>
               </a:rPr>
-              <a:t>自動配信・顧客管理・効果分析ができ、月額0円（初期費用なし）から始められます。</a:t>
+              <a:t>月額0円・初期費用なしから始められます。</a:t>
             </a:r>
             <a:endParaRPr lang="en-US" altLang="ja-JP" sz="1400" dirty="0">
               <a:solidFill>
@@ -2880,8 +2880,8 @@
         </p:nvSpPr>
         <p:spPr>
           <a:xfrm>
-            <a:off x="429768" y="1463040"/>
-            <a:ext cx="914400" cy="256032"/>
+            <a:off x="429768" y="1481328"/>
+            <a:ext cx="1005840" cy="292608"/>
           </a:xfrm>
           <a:prstGeom prst="roundRect">
             <a:avLst>
@@ -2907,7 +2907,7 @@
               <a:buNone/>
             </a:pPr>
             <a:r>
-              <a:rPr lang="ja-JP" altLang="en-US" sz="1300" b="1" dirty="0">
+              <a:rPr lang="ja-JP" altLang="en-US" sz="1400" b="1" dirty="0">
                 <a:solidFill>
                   <a:srgbClr val="FFFFFF"/>
                 </a:solidFill>
@@ -2916,7 +2916,7 @@
               </a:rPr>
               <a:t>機能</a:t>
             </a:r>
-            <a:endParaRPr lang="ja-JP" altLang="en-US" sz="1300" dirty="0"/>
+            <a:endParaRPr lang="ja-JP" altLang="en-US" sz="1400" dirty="0"/>
           </a:p>
         </p:txBody>
       </p:sp>
@@ -2928,8 +2928,8 @@
         </p:nvSpPr>
         <p:spPr>
           <a:xfrm>
-            <a:off x="1435608" y="1463040"/>
-            <a:ext cx="7918704" cy="256032"/>
+            <a:off x="1527048" y="1481328"/>
+            <a:ext cx="7827264" cy="292608"/>
           </a:xfrm>
           <a:prstGeom prst="rect">
             <a:avLst/>
@@ -2949,16 +2949,16 @@
               <a:buNone/>
             </a:pPr>
             <a:r>
-              <a:rPr lang="ja-JP" altLang="en-US" sz="1250" b="1" dirty="0">
+              <a:rPr lang="ja-JP" altLang="en-US" sz="1300" b="1" dirty="0">
                 <a:solidFill>
                   <a:srgbClr val="1F285A"/>
                 </a:solidFill>
                 <a:latin typeface="メイリオ" panose="020B0604030504040204" pitchFamily="50" charset="-128"/>
                 <a:ea typeface="メイリオ" panose="020B0604030504040204" pitchFamily="50" charset="-128"/>
               </a:rPr>
-              <a:t>Lステップの3つの特徴｜配信の自動化・顧客管理・効果分析</a:t>
-            </a:r>
-            <a:endParaRPr lang="ja-JP" altLang="en-US" sz="1250" dirty="0"/>
+              <a:t>Lステップの3つの特徴</a:t>
+            </a:r>
+            <a:endParaRPr lang="ja-JP" altLang="en-US" sz="1300" dirty="0"/>
           </a:p>
         </p:txBody>
       </p:sp>
@@ -2970,12 +2970,12 @@
         </p:nvSpPr>
         <p:spPr>
           <a:xfrm>
-            <a:off x="429768" y="1755648"/>
-            <a:ext cx="2788920" cy="548640"/>
+            <a:off x="429768" y="1810512"/>
+            <a:ext cx="2788920" cy="402336"/>
           </a:xfrm>
           <a:prstGeom prst="roundRect">
             <a:avLst>
-              <a:gd name="adj" fmla="val 12000"/>
+              <a:gd name="adj" fmla="val 14000"/>
             </a:avLst>
           </a:prstGeom>
           <a:solidFill>
@@ -2988,7 +2988,7 @@
           </a:ln>
         </p:spPr>
         <p:txBody>
-          <a:bodyPr wrap="square" lIns="128016" tIns="27432" rIns="91440" bIns="27432" rtlCol="0" anchor="ctr">
+          <a:bodyPr wrap="square" lIns="146304" tIns="27432" rIns="91440" bIns="27432" rtlCol="0" anchor="ctr">
             <a:noAutofit/>
           </a:bodyPr>
           <a:lstStyle/>
@@ -2997,7 +2997,7 @@
               <a:buNone/>
             </a:pPr>
             <a:r>
-              <a:rPr lang="ja-JP" altLang="en-US" sz="1400" b="1" dirty="0">
+              <a:rPr lang="ja-JP" altLang="en-US" sz="1600" b="1" dirty="0">
                 <a:solidFill>
                   <a:srgbClr val="FFFFFF"/>
                 </a:solidFill>
@@ -3006,23 +3006,7 @@
               </a:rPr>
               <a:t>① 配信を自動化</a:t>
             </a:r>
-            <a:endParaRPr lang="ja-JP" altLang="en-US" sz="1400" dirty="0"/>
-          </a:p>
-          <a:p>
-            <a:pPr algn="l">
-              <a:buNone/>
-            </a:pPr>
-            <a:r>
-              <a:rPr lang="ja-JP" altLang="en-US" sz="1050" b="0" dirty="0">
-                <a:solidFill>
-                  <a:srgbClr val="FFFFFF"/>
-                </a:solidFill>
-                <a:latin typeface="メイリオ" panose="020B0604030504040204" pitchFamily="50" charset="-128"/>
-                <a:ea typeface="メイリオ" panose="020B0604030504040204" pitchFamily="50" charset="-128"/>
-              </a:rPr>
-              <a:t>お客様の行動に合わせて自動で届ける</a:t>
-            </a:r>
-            <a:endParaRPr lang="ja-JP" altLang="en-US" sz="1400" dirty="0"/>
+            <a:endParaRPr lang="ja-JP" altLang="en-US" sz="1600" dirty="0"/>
           </a:p>
         </p:txBody>
       </p:sp>
@@ -3034,8 +3018,8 @@
         </p:nvSpPr>
         <p:spPr>
           <a:xfrm>
-            <a:off x="429768" y="2340864"/>
-            <a:ext cx="2788920" cy="1097280"/>
+            <a:off x="429768" y="2249424"/>
+            <a:ext cx="2788920" cy="1280160"/>
           </a:xfrm>
           <a:prstGeom prst="roundRect">
             <a:avLst>
@@ -3052,10 +3036,48 @@
           </a:ln>
         </p:spPr>
         <p:txBody>
-          <a:bodyPr wrap="square" lIns="109728" tIns="64008" rIns="73152" bIns="36576" rtlCol="0" anchor="t">
+          <a:bodyPr wrap="square" lIns="146304" tIns="82296" rIns="73152" bIns="36576" rtlCol="0" anchor="t">
             <a:noAutofit/>
           </a:bodyPr>
           <a:lstStyle/>
+          <a:p>
+            <a:pPr algn="l">
+              <a:spcBef>
+                <a:spcPts val="0"/>
+              </a:spcBef>
+              <a:buNone/>
+            </a:pPr>
+            <a:r>
+              <a:rPr lang="ja-JP" altLang="en-US" sz="1200" b="1" dirty="0">
+                <a:solidFill>
+                  <a:srgbClr val="1F285A"/>
+                </a:solidFill>
+                <a:latin typeface="メイリオ" panose="020B0604030504040204" pitchFamily="50" charset="-128"/>
+                <a:ea typeface="メイリオ" panose="020B0604030504040204" pitchFamily="50" charset="-128"/>
+              </a:rPr>
+              <a:t>行動に合わせて自動で配信</a:t>
+            </a:r>
+            <a:endParaRPr lang="ja-JP" altLang="en-US" sz="1200" dirty="0"/>
+          </a:p>
+          <a:p>
+            <a:pPr algn="l">
+              <a:spcBef>
+                <a:spcPts val="400"/>
+              </a:spcBef>
+              <a:buNone/>
+            </a:pPr>
+            <a:r>
+              <a:rPr lang="ja-JP" altLang="en-US" sz="1200" b="0" dirty="0">
+                <a:solidFill>
+                  <a:srgbClr val="333333"/>
+                </a:solidFill>
+                <a:latin typeface="メイリオ" panose="020B0604030504040204" pitchFamily="50" charset="-128"/>
+                <a:ea typeface="メイリオ" panose="020B0604030504040204" pitchFamily="50" charset="-128"/>
+              </a:rPr>
+              <a:t>・ステップ配信</a:t>
+            </a:r>
+            <a:endParaRPr lang="ja-JP" altLang="en-US" sz="1200" dirty="0"/>
+          </a:p>
           <a:p>
             <a:pPr algn="l">
               <a:spcBef>
@@ -3064,26 +3086,16 @@
               <a:buNone/>
             </a:pPr>
             <a:r>
-              <a:rPr lang="ja-JP" altLang="en-US" sz="1100" b="1" dirty="0">
-                <a:solidFill>
-                  <a:srgbClr val="1F285A"/>
+              <a:rPr lang="ja-JP" altLang="en-US" sz="1200" b="0" dirty="0">
+                <a:solidFill>
+                  <a:srgbClr val="333333"/>
                 </a:solidFill>
                 <a:latin typeface="メイリオ" panose="020B0604030504040204" pitchFamily="50" charset="-128"/>
                 <a:ea typeface="メイリオ" panose="020B0604030504040204" pitchFamily="50" charset="-128"/>
               </a:rPr>
-              <a:t>・ステップ配信</a:t>
-            </a:r>
-            <a:r>
-              <a:rPr lang="ja-JP" altLang="en-US" sz="1100" b="0" dirty="0">
-                <a:solidFill>
-                  <a:srgbClr val="333333"/>
-                </a:solidFill>
-                <a:latin typeface="メイリオ" panose="020B0604030504040204" pitchFamily="50" charset="-128"/>
-                <a:ea typeface="メイリオ" panose="020B0604030504040204" pitchFamily="50" charset="-128"/>
-              </a:rPr>
-              <a:t>｜順番に自動で配信</a:t>
-            </a:r>
-            <a:endParaRPr lang="ja-JP" altLang="en-US" sz="1100" dirty="0"/>
+              <a:t>・セグメント配信</a:t>
+            </a:r>
+            <a:endParaRPr lang="ja-JP" altLang="en-US" sz="1200" dirty="0"/>
           </a:p>
           <a:p>
             <a:pPr algn="l">
@@ -3093,84 +3105,16 @@
               <a:buNone/>
             </a:pPr>
             <a:r>
-              <a:rPr lang="ja-JP" altLang="en-US" sz="1100" b="1" dirty="0">
-                <a:solidFill>
-                  <a:srgbClr val="1F285A"/>
+              <a:rPr lang="ja-JP" altLang="en-US" sz="1200" b="0" dirty="0">
+                <a:solidFill>
+                  <a:srgbClr val="333333"/>
                 </a:solidFill>
                 <a:latin typeface="メイリオ" panose="020B0604030504040204" pitchFamily="50" charset="-128"/>
                 <a:ea typeface="メイリオ" panose="020B0604030504040204" pitchFamily="50" charset="-128"/>
               </a:rPr>
-              <a:t>・セグメント配信</a:t>
-            </a:r>
-            <a:r>
-              <a:rPr lang="ja-JP" altLang="en-US" sz="1100" b="0" dirty="0">
-                <a:solidFill>
-                  <a:srgbClr val="333333"/>
-                </a:solidFill>
-                <a:latin typeface="メイリオ" panose="020B0604030504040204" pitchFamily="50" charset="-128"/>
-                <a:ea typeface="メイリオ" panose="020B0604030504040204" pitchFamily="50" charset="-128"/>
-              </a:rPr>
-              <a:t>｜狙った方だけに配信</a:t>
-            </a:r>
-            <a:endParaRPr lang="ja-JP" altLang="en-US" sz="1100" dirty="0"/>
-          </a:p>
-          <a:p>
-            <a:pPr algn="l">
-              <a:spcBef>
-                <a:spcPts val="200"/>
-              </a:spcBef>
-              <a:buNone/>
-            </a:pPr>
-            <a:r>
-              <a:rPr lang="ja-JP" altLang="en-US" sz="1100" b="1" dirty="0">
-                <a:solidFill>
-                  <a:srgbClr val="1F285A"/>
-                </a:solidFill>
-                <a:latin typeface="メイリオ" panose="020B0604030504040204" pitchFamily="50" charset="-128"/>
-                <a:ea typeface="メイリオ" panose="020B0604030504040204" pitchFamily="50" charset="-128"/>
-              </a:rPr>
-              <a:t>・リマインダ配信</a:t>
-            </a:r>
-            <a:r>
-              <a:rPr lang="ja-JP" altLang="en-US" sz="1100" b="0" dirty="0">
-                <a:solidFill>
-                  <a:srgbClr val="333333"/>
-                </a:solidFill>
-                <a:latin typeface="メイリオ" panose="020B0604030504040204" pitchFamily="50" charset="-128"/>
-                <a:ea typeface="メイリオ" panose="020B0604030504040204" pitchFamily="50" charset="-128"/>
-              </a:rPr>
-              <a:t>｜予約前に自動で通知</a:t>
-            </a:r>
-            <a:endParaRPr lang="ja-JP" altLang="en-US" sz="1100" dirty="0"/>
-          </a:p>
-          <a:p>
-            <a:pPr algn="l">
-              <a:spcBef>
-                <a:spcPts val="200"/>
-              </a:spcBef>
-              <a:buNone/>
-            </a:pPr>
-            <a:r>
-              <a:rPr lang="ja-JP" altLang="en-US" sz="1100" b="1" dirty="0">
-                <a:solidFill>
-                  <a:srgbClr val="1F285A"/>
-                </a:solidFill>
-                <a:latin typeface="メイリオ" panose="020B0604030504040204" pitchFamily="50" charset="-128"/>
-                <a:ea typeface="メイリオ" panose="020B0604030504040204" pitchFamily="50" charset="-128"/>
-              </a:rPr>
               <a:t>・自動応答</a:t>
             </a:r>
-            <a:r>
-              <a:rPr lang="ja-JP" altLang="en-US" sz="1100" b="0" dirty="0">
-                <a:solidFill>
-                  <a:srgbClr val="333333"/>
-                </a:solidFill>
-                <a:latin typeface="メイリオ" panose="020B0604030504040204" pitchFamily="50" charset="-128"/>
-                <a:ea typeface="メイリオ" panose="020B0604030504040204" pitchFamily="50" charset="-128"/>
-              </a:rPr>
-              <a:t>｜質問に自動で返信</a:t>
-            </a:r>
-            <a:endParaRPr lang="ja-JP" altLang="en-US" sz="1100" dirty="0"/>
+            <a:endParaRPr lang="ja-JP" altLang="en-US" sz="1200" dirty="0"/>
           </a:p>
         </p:txBody>
       </p:sp>
@@ -3182,12 +3126,12 @@
         </p:nvSpPr>
         <p:spPr>
           <a:xfrm>
-            <a:off x="3497580" y="1755648"/>
-            <a:ext cx="2788920" cy="548640"/>
+            <a:off x="3497580" y="1810512"/>
+            <a:ext cx="2788920" cy="402336"/>
           </a:xfrm>
           <a:prstGeom prst="roundRect">
             <a:avLst>
-              <a:gd name="adj" fmla="val 12000"/>
+              <a:gd name="adj" fmla="val 14000"/>
             </a:avLst>
           </a:prstGeom>
           <a:solidFill>
@@ -3200,7 +3144,7 @@
           </a:ln>
         </p:spPr>
         <p:txBody>
-          <a:bodyPr wrap="square" lIns="128016" tIns="27432" rIns="91440" bIns="27432" rtlCol="0" anchor="ctr">
+          <a:bodyPr wrap="square" lIns="146304" tIns="27432" rIns="91440" bIns="27432" rtlCol="0" anchor="ctr">
             <a:noAutofit/>
           </a:bodyPr>
           <a:lstStyle/>
@@ -3209,7 +3153,7 @@
               <a:buNone/>
             </a:pPr>
             <a:r>
-              <a:rPr lang="ja-JP" altLang="en-US" sz="1400" b="1" dirty="0">
+              <a:rPr lang="ja-JP" altLang="en-US" sz="1600" b="1" dirty="0">
                 <a:solidFill>
                   <a:srgbClr val="FFFFFF"/>
                 </a:solidFill>
@@ -3218,23 +3162,7 @@
               </a:rPr>
               <a:t>② お客様を管理</a:t>
             </a:r>
-            <a:endParaRPr lang="ja-JP" altLang="en-US" sz="1400" dirty="0"/>
-          </a:p>
-          <a:p>
-            <a:pPr algn="l">
-              <a:buNone/>
-            </a:pPr>
-            <a:r>
-              <a:rPr lang="ja-JP" altLang="en-US" sz="1050" b="0" dirty="0">
-                <a:solidFill>
-                  <a:srgbClr val="FFFFFF"/>
-                </a:solidFill>
-                <a:latin typeface="メイリオ" panose="020B0604030504040204" pitchFamily="50" charset="-128"/>
-                <a:ea typeface="メイリオ" panose="020B0604030504040204" pitchFamily="50" charset="-128"/>
-              </a:rPr>
-              <a:t>友だちごとの情報と対応状況を一元管理</a:t>
-            </a:r>
-            <a:endParaRPr lang="ja-JP" altLang="en-US" sz="1400" dirty="0"/>
+            <a:endParaRPr lang="ja-JP" altLang="en-US" sz="1600" dirty="0"/>
           </a:p>
         </p:txBody>
       </p:sp>
@@ -3246,8 +3174,8 @@
         </p:nvSpPr>
         <p:spPr>
           <a:xfrm>
-            <a:off x="3497580" y="2340864"/>
-            <a:ext cx="2788920" cy="1097280"/>
+            <a:off x="3497580" y="2249424"/>
+            <a:ext cx="2788920" cy="1280160"/>
           </a:xfrm>
           <a:prstGeom prst="roundRect">
             <a:avLst>
@@ -3264,10 +3192,48 @@
           </a:ln>
         </p:spPr>
         <p:txBody>
-          <a:bodyPr wrap="square" lIns="109728" tIns="64008" rIns="73152" bIns="36576" rtlCol="0" anchor="t">
+          <a:bodyPr wrap="square" lIns="146304" tIns="82296" rIns="73152" bIns="36576" rtlCol="0" anchor="t">
             <a:noAutofit/>
           </a:bodyPr>
           <a:lstStyle/>
+          <a:p>
+            <a:pPr algn="l">
+              <a:spcBef>
+                <a:spcPts val="0"/>
+              </a:spcBef>
+              <a:buNone/>
+            </a:pPr>
+            <a:r>
+              <a:rPr lang="ja-JP" altLang="en-US" sz="1200" b="1" dirty="0">
+                <a:solidFill>
+                  <a:srgbClr val="1F285A"/>
+                </a:solidFill>
+                <a:latin typeface="メイリオ" panose="020B0604030504040204" pitchFamily="50" charset="-128"/>
+                <a:ea typeface="メイリオ" panose="020B0604030504040204" pitchFamily="50" charset="-128"/>
+              </a:rPr>
+              <a:t>情報と対応状況をまとめて管理</a:t>
+            </a:r>
+            <a:endParaRPr lang="ja-JP" altLang="en-US" sz="1200" dirty="0"/>
+          </a:p>
+          <a:p>
+            <a:pPr algn="l">
+              <a:spcBef>
+                <a:spcPts val="400"/>
+              </a:spcBef>
+              <a:buNone/>
+            </a:pPr>
+            <a:r>
+              <a:rPr lang="ja-JP" altLang="en-US" sz="1200" b="0" dirty="0">
+                <a:solidFill>
+                  <a:srgbClr val="333333"/>
+                </a:solidFill>
+                <a:latin typeface="メイリオ" panose="020B0604030504040204" pitchFamily="50" charset="-128"/>
+                <a:ea typeface="メイリオ" panose="020B0604030504040204" pitchFamily="50" charset="-128"/>
+              </a:rPr>
+              <a:t>・友だち情報</a:t>
+            </a:r>
+            <a:endParaRPr lang="ja-JP" altLang="en-US" sz="1200" dirty="0"/>
+          </a:p>
           <a:p>
             <a:pPr algn="l">
               <a:spcBef>
@@ -3276,26 +3242,16 @@
               <a:buNone/>
             </a:pPr>
             <a:r>
-              <a:rPr lang="ja-JP" altLang="en-US" sz="1100" b="1" dirty="0">
-                <a:solidFill>
-                  <a:srgbClr val="1F285A"/>
+              <a:rPr lang="ja-JP" altLang="en-US" sz="1200" b="0" dirty="0">
+                <a:solidFill>
+                  <a:srgbClr val="333333"/>
                 </a:solidFill>
                 <a:latin typeface="メイリオ" panose="020B0604030504040204" pitchFamily="50" charset="-128"/>
                 <a:ea typeface="メイリオ" panose="020B0604030504040204" pitchFamily="50" charset="-128"/>
               </a:rPr>
-              <a:t>・友だち情報</a:t>
-            </a:r>
-            <a:r>
-              <a:rPr lang="ja-JP" altLang="en-US" sz="1100" b="0" dirty="0">
-                <a:solidFill>
-                  <a:srgbClr val="333333"/>
-                </a:solidFill>
-                <a:latin typeface="メイリオ" panose="020B0604030504040204" pitchFamily="50" charset="-128"/>
-                <a:ea typeface="メイリオ" panose="020B0604030504040204" pitchFamily="50" charset="-128"/>
-              </a:rPr>
-              <a:t>｜属性や行動を記録</a:t>
-            </a:r>
-            <a:endParaRPr lang="ja-JP" altLang="en-US" sz="1100" dirty="0"/>
+              <a:t>・個別トーク</a:t>
+            </a:r>
+            <a:endParaRPr lang="ja-JP" altLang="en-US" sz="1200" dirty="0"/>
           </a:p>
           <a:p>
             <a:pPr algn="l">
@@ -3305,84 +3261,16 @@
               <a:buNone/>
             </a:pPr>
             <a:r>
-              <a:rPr lang="ja-JP" altLang="en-US" sz="1100" b="1" dirty="0">
-                <a:solidFill>
-                  <a:srgbClr val="1F285A"/>
+              <a:rPr lang="ja-JP" altLang="en-US" sz="1200" b="0" dirty="0">
+                <a:solidFill>
+                  <a:srgbClr val="333333"/>
                 </a:solidFill>
                 <a:latin typeface="メイリオ" panose="020B0604030504040204" pitchFamily="50" charset="-128"/>
                 <a:ea typeface="メイリオ" panose="020B0604030504040204" pitchFamily="50" charset="-128"/>
               </a:rPr>
-              <a:t>・個別トーク</a:t>
-            </a:r>
-            <a:r>
-              <a:rPr lang="ja-JP" altLang="en-US" sz="1100" b="0" dirty="0">
-                <a:solidFill>
-                  <a:srgbClr val="333333"/>
-                </a:solidFill>
-                <a:latin typeface="メイリオ" panose="020B0604030504040204" pitchFamily="50" charset="-128"/>
-                <a:ea typeface="メイリオ" panose="020B0604030504040204" pitchFamily="50" charset="-128"/>
-              </a:rPr>
-              <a:t>｜1対1でチャット対応</a:t>
-            </a:r>
-            <a:endParaRPr lang="ja-JP" altLang="en-US" sz="1100" dirty="0"/>
-          </a:p>
-          <a:p>
-            <a:pPr algn="l">
-              <a:spcBef>
-                <a:spcPts val="200"/>
-              </a:spcBef>
-              <a:buNone/>
-            </a:pPr>
-            <a:r>
-              <a:rPr lang="ja-JP" altLang="en-US" sz="1100" b="1" dirty="0">
-                <a:solidFill>
-                  <a:srgbClr val="1F285A"/>
-                </a:solidFill>
-                <a:latin typeface="メイリオ" panose="020B0604030504040204" pitchFamily="50" charset="-128"/>
-                <a:ea typeface="メイリオ" panose="020B0604030504040204" pitchFamily="50" charset="-128"/>
-              </a:rPr>
-              <a:t>・回答フォーム</a:t>
-            </a:r>
-            <a:r>
-              <a:rPr lang="ja-JP" altLang="en-US" sz="1100" b="0" dirty="0">
-                <a:solidFill>
-                  <a:srgbClr val="333333"/>
-                </a:solidFill>
-                <a:latin typeface="メイリオ" panose="020B0604030504040204" pitchFamily="50" charset="-128"/>
-                <a:ea typeface="メイリオ" panose="020B0604030504040204" pitchFamily="50" charset="-128"/>
-              </a:rPr>
-              <a:t>｜アンケート・申込受付</a:t>
-            </a:r>
-            <a:endParaRPr lang="ja-JP" altLang="en-US" sz="1100" dirty="0"/>
-          </a:p>
-          <a:p>
-            <a:pPr algn="l">
-              <a:spcBef>
-                <a:spcPts val="200"/>
-              </a:spcBef>
-              <a:buNone/>
-            </a:pPr>
-            <a:r>
-              <a:rPr lang="ja-JP" altLang="en-US" sz="1100" b="1" dirty="0">
-                <a:solidFill>
-                  <a:srgbClr val="1F285A"/>
-                </a:solidFill>
-                <a:latin typeface="メイリオ" panose="020B0604030504040204" pitchFamily="50" charset="-128"/>
-                <a:ea typeface="メイリオ" panose="020B0604030504040204" pitchFamily="50" charset="-128"/>
-              </a:rPr>
               <a:t>・予約管理</a:t>
             </a:r>
-            <a:r>
-              <a:rPr lang="ja-JP" altLang="en-US" sz="1100" b="0" dirty="0">
-                <a:solidFill>
-                  <a:srgbClr val="333333"/>
-                </a:solidFill>
-                <a:latin typeface="メイリオ" panose="020B0604030504040204" pitchFamily="50" charset="-128"/>
-                <a:ea typeface="メイリオ" panose="020B0604030504040204" pitchFamily="50" charset="-128"/>
-              </a:rPr>
-              <a:t>｜LINEで予約を受付</a:t>
-            </a:r>
-            <a:endParaRPr lang="ja-JP" altLang="en-US" sz="1100" dirty="0"/>
+            <a:endParaRPr lang="ja-JP" altLang="en-US" sz="1200" dirty="0"/>
           </a:p>
         </p:txBody>
       </p:sp>
@@ -3394,12 +3282,12 @@
         </p:nvSpPr>
         <p:spPr>
           <a:xfrm>
-            <a:off x="6565392" y="1755648"/>
-            <a:ext cx="2788920" cy="548640"/>
+            <a:off x="6565392" y="1810512"/>
+            <a:ext cx="2788920" cy="402336"/>
           </a:xfrm>
           <a:prstGeom prst="roundRect">
             <a:avLst>
-              <a:gd name="adj" fmla="val 12000"/>
+              <a:gd name="adj" fmla="val 14000"/>
             </a:avLst>
           </a:prstGeom>
           <a:solidFill>
@@ -3412,7 +3300,7 @@
           </a:ln>
         </p:spPr>
         <p:txBody>
-          <a:bodyPr wrap="square" lIns="128016" tIns="27432" rIns="91440" bIns="27432" rtlCol="0" anchor="ctr">
+          <a:bodyPr wrap="square" lIns="146304" tIns="27432" rIns="91440" bIns="27432" rtlCol="0" anchor="ctr">
             <a:noAutofit/>
           </a:bodyPr>
           <a:lstStyle/>
@@ -3421,7 +3309,7 @@
               <a:buNone/>
             </a:pPr>
             <a:r>
-              <a:rPr lang="ja-JP" altLang="en-US" sz="1400" b="1" dirty="0">
+              <a:rPr lang="ja-JP" altLang="en-US" sz="1600" b="1" dirty="0">
                 <a:solidFill>
                   <a:srgbClr val="FFFFFF"/>
                 </a:solidFill>
@@ -3430,23 +3318,7 @@
               </a:rPr>
               <a:t>③ 効果を分析</a:t>
             </a:r>
-            <a:endParaRPr lang="ja-JP" altLang="en-US" sz="1400" dirty="0"/>
-          </a:p>
-          <a:p>
-            <a:pPr algn="l">
-              <a:buNone/>
-            </a:pPr>
-            <a:r>
-              <a:rPr lang="ja-JP" altLang="en-US" sz="1050" b="0" dirty="0">
-                <a:solidFill>
-                  <a:srgbClr val="FFFFFF"/>
-                </a:solidFill>
-                <a:latin typeface="メイリオ" panose="020B0604030504040204" pitchFamily="50" charset="-128"/>
-                <a:ea typeface="メイリオ" panose="020B0604030504040204" pitchFamily="50" charset="-128"/>
-              </a:rPr>
-              <a:t>どこから来て何に反応したかを把握</a:t>
-            </a:r>
-            <a:endParaRPr lang="ja-JP" altLang="en-US" sz="1400" dirty="0"/>
+            <a:endParaRPr lang="ja-JP" altLang="en-US" sz="1600" dirty="0"/>
           </a:p>
         </p:txBody>
       </p:sp>
@@ -3458,8 +3330,8 @@
         </p:nvSpPr>
         <p:spPr>
           <a:xfrm>
-            <a:off x="6565392" y="2340864"/>
-            <a:ext cx="2788920" cy="1097280"/>
+            <a:off x="6565392" y="2249424"/>
+            <a:ext cx="2788920" cy="1280160"/>
           </a:xfrm>
           <a:prstGeom prst="roundRect">
             <a:avLst>
@@ -3476,10 +3348,48 @@
           </a:ln>
         </p:spPr>
         <p:txBody>
-          <a:bodyPr wrap="square" lIns="109728" tIns="64008" rIns="73152" bIns="36576" rtlCol="0" anchor="t">
+          <a:bodyPr wrap="square" lIns="146304" tIns="82296" rIns="73152" bIns="36576" rtlCol="0" anchor="t">
             <a:noAutofit/>
           </a:bodyPr>
           <a:lstStyle/>
+          <a:p>
+            <a:pPr algn="l">
+              <a:spcBef>
+                <a:spcPts val="0"/>
+              </a:spcBef>
+              <a:buNone/>
+            </a:pPr>
+            <a:r>
+              <a:rPr lang="ja-JP" altLang="en-US" sz="1200" b="1" dirty="0">
+                <a:solidFill>
+                  <a:srgbClr val="1F285A"/>
+                </a:solidFill>
+                <a:latin typeface="メイリオ" panose="020B0604030504040204" pitchFamily="50" charset="-128"/>
+                <a:ea typeface="メイリオ" panose="020B0604030504040204" pitchFamily="50" charset="-128"/>
+              </a:rPr>
+              <a:t>来た経路と反応を数字で把握</a:t>
+            </a:r>
+            <a:endParaRPr lang="ja-JP" altLang="en-US" sz="1200" dirty="0"/>
+          </a:p>
+          <a:p>
+            <a:pPr algn="l">
+              <a:spcBef>
+                <a:spcPts val="400"/>
+              </a:spcBef>
+              <a:buNone/>
+            </a:pPr>
+            <a:r>
+              <a:rPr lang="ja-JP" altLang="en-US" sz="1200" b="0" dirty="0">
+                <a:solidFill>
+                  <a:srgbClr val="333333"/>
+                </a:solidFill>
+                <a:latin typeface="メイリオ" panose="020B0604030504040204" pitchFamily="50" charset="-128"/>
+                <a:ea typeface="メイリオ" panose="020B0604030504040204" pitchFamily="50" charset="-128"/>
+              </a:rPr>
+              <a:t>・流入経路分析</a:t>
+            </a:r>
+            <a:endParaRPr lang="ja-JP" altLang="en-US" sz="1200" dirty="0"/>
+          </a:p>
           <a:p>
             <a:pPr algn="l">
               <a:spcBef>
@@ -3488,26 +3398,16 @@
               <a:buNone/>
             </a:pPr>
             <a:r>
-              <a:rPr lang="ja-JP" altLang="en-US" sz="1100" b="1" dirty="0">
-                <a:solidFill>
-                  <a:srgbClr val="1F285A"/>
+              <a:rPr lang="ja-JP" altLang="en-US" sz="1200" b="0" dirty="0">
+                <a:solidFill>
+                  <a:srgbClr val="333333"/>
                 </a:solidFill>
                 <a:latin typeface="メイリオ" panose="020B0604030504040204" pitchFamily="50" charset="-128"/>
                 <a:ea typeface="メイリオ" panose="020B0604030504040204" pitchFamily="50" charset="-128"/>
               </a:rPr>
-              <a:t>・流入経路分析</a:t>
-            </a:r>
-            <a:r>
-              <a:rPr lang="ja-JP" altLang="en-US" sz="1100" b="0" dirty="0">
-                <a:solidFill>
-                  <a:srgbClr val="333333"/>
-                </a:solidFill>
-                <a:latin typeface="メイリオ" panose="020B0604030504040204" pitchFamily="50" charset="-128"/>
-                <a:ea typeface="メイリオ" panose="020B0604030504040204" pitchFamily="50" charset="-128"/>
-              </a:rPr>
-              <a:t>｜どこから追加したか</a:t>
-            </a:r>
-            <a:endParaRPr lang="ja-JP" altLang="en-US" sz="1100" dirty="0"/>
+              <a:t>・クリック測定</a:t>
+            </a:r>
+            <a:endParaRPr lang="ja-JP" altLang="en-US" sz="1200" dirty="0"/>
           </a:p>
           <a:p>
             <a:pPr algn="l">
@@ -3517,84 +3417,16 @@
               <a:buNone/>
             </a:pPr>
             <a:r>
-              <a:rPr lang="ja-JP" altLang="en-US" sz="1100" b="1" dirty="0">
-                <a:solidFill>
-                  <a:srgbClr val="1F285A"/>
+              <a:rPr lang="ja-JP" altLang="en-US" sz="1200" b="0" dirty="0">
+                <a:solidFill>
+                  <a:srgbClr val="333333"/>
                 </a:solidFill>
                 <a:latin typeface="メイリオ" panose="020B0604030504040204" pitchFamily="50" charset="-128"/>
                 <a:ea typeface="メイリオ" panose="020B0604030504040204" pitchFamily="50" charset="-128"/>
               </a:rPr>
-              <a:t>・URLクリック測定</a:t>
-            </a:r>
-            <a:r>
-              <a:rPr lang="ja-JP" altLang="en-US" sz="1100" b="0" dirty="0">
-                <a:solidFill>
-                  <a:srgbClr val="333333"/>
-                </a:solidFill>
-                <a:latin typeface="メイリオ" panose="020B0604030504040204" pitchFamily="50" charset="-128"/>
-                <a:ea typeface="メイリオ" panose="020B0604030504040204" pitchFamily="50" charset="-128"/>
-              </a:rPr>
-              <a:t>｜誰が押したか</a:t>
-            </a:r>
-            <a:endParaRPr lang="ja-JP" altLang="en-US" sz="1100" dirty="0"/>
-          </a:p>
-          <a:p>
-            <a:pPr algn="l">
-              <a:spcBef>
-                <a:spcPts val="200"/>
-              </a:spcBef>
-              <a:buNone/>
-            </a:pPr>
-            <a:r>
-              <a:rPr lang="ja-JP" altLang="en-US" sz="1100" b="1" dirty="0">
-                <a:solidFill>
-                  <a:srgbClr val="1F285A"/>
-                </a:solidFill>
-                <a:latin typeface="メイリオ" panose="020B0604030504040204" pitchFamily="50" charset="-128"/>
-                <a:ea typeface="メイリオ" panose="020B0604030504040204" pitchFamily="50" charset="-128"/>
-              </a:rPr>
               <a:t>・ファネル分析</a:t>
             </a:r>
-            <a:r>
-              <a:rPr lang="ja-JP" altLang="en-US" sz="1100" b="0" dirty="0">
-                <a:solidFill>
-                  <a:srgbClr val="333333"/>
-                </a:solidFill>
-                <a:latin typeface="メイリオ" panose="020B0604030504040204" pitchFamily="50" charset="-128"/>
-                <a:ea typeface="メイリオ" panose="020B0604030504040204" pitchFamily="50" charset="-128"/>
-              </a:rPr>
-              <a:t>｜離脱ポイントを把握</a:t>
-            </a:r>
-            <a:endParaRPr lang="ja-JP" altLang="en-US" sz="1100" dirty="0"/>
-          </a:p>
-          <a:p>
-            <a:pPr algn="l">
-              <a:spcBef>
-                <a:spcPts val="200"/>
-              </a:spcBef>
-              <a:buNone/>
-            </a:pPr>
-            <a:r>
-              <a:rPr lang="ja-JP" altLang="en-US" sz="1100" b="1" dirty="0">
-                <a:solidFill>
-                  <a:srgbClr val="1F285A"/>
-                </a:solidFill>
-                <a:latin typeface="メイリオ" panose="020B0604030504040204" pitchFamily="50" charset="-128"/>
-                <a:ea typeface="メイリオ" panose="020B0604030504040204" pitchFamily="50" charset="-128"/>
-              </a:rPr>
-              <a:t>・行動スコアリング</a:t>
-            </a:r>
-            <a:r>
-              <a:rPr lang="ja-JP" altLang="en-US" sz="1100" b="0" dirty="0">
-                <a:solidFill>
-                  <a:srgbClr val="333333"/>
-                </a:solidFill>
-                <a:latin typeface="メイリオ" panose="020B0604030504040204" pitchFamily="50" charset="-128"/>
-                <a:ea typeface="メイリオ" panose="020B0604030504040204" pitchFamily="50" charset="-128"/>
-              </a:rPr>
-              <a:t>｜関心度を点数化</a:t>
-            </a:r>
-            <a:endParaRPr lang="ja-JP" altLang="en-US" sz="1100" dirty="0"/>
+            <a:endParaRPr lang="ja-JP" altLang="en-US" sz="1200" dirty="0"/>
           </a:p>
         </p:txBody>
       </p:sp>
@@ -3606,8 +3438,8 @@
         </p:nvSpPr>
         <p:spPr>
           <a:xfrm>
-            <a:off x="429768" y="3511296"/>
-            <a:ext cx="914400" cy="256032"/>
+            <a:off x="429768" y="3639312"/>
+            <a:ext cx="1005840" cy="292608"/>
           </a:xfrm>
           <a:prstGeom prst="roundRect">
             <a:avLst>
@@ -3633,7 +3465,7 @@
               <a:buNone/>
             </a:pPr>
             <a:r>
-              <a:rPr lang="ja-JP" altLang="en-US" sz="1300" b="1" dirty="0">
+              <a:rPr lang="ja-JP" altLang="en-US" sz="1400" b="1" dirty="0">
                 <a:solidFill>
                   <a:srgbClr val="FFFFFF"/>
                 </a:solidFill>
@@ -3642,7 +3474,7 @@
               </a:rPr>
               <a:t>費用感</a:t>
             </a:r>
-            <a:endParaRPr lang="ja-JP" altLang="en-US" sz="1300" dirty="0"/>
+            <a:endParaRPr lang="ja-JP" altLang="en-US" sz="1400" dirty="0"/>
           </a:p>
         </p:txBody>
       </p:sp>
@@ -3654,8 +3486,8 @@
         </p:nvSpPr>
         <p:spPr>
           <a:xfrm>
-            <a:off x="1435608" y="3511296"/>
-            <a:ext cx="7918704" cy="256032"/>
+            <a:off x="1527048" y="3639312"/>
+            <a:ext cx="7827264" cy="292608"/>
           </a:xfrm>
           <a:prstGeom prst="rect">
             <a:avLst/>
@@ -3675,16 +3507,16 @@
               <a:buNone/>
             </a:pPr>
             <a:r>
-              <a:rPr lang="ja-JP" altLang="en-US" sz="1250" b="1" dirty="0">
+              <a:rPr lang="ja-JP" altLang="en-US" sz="1300" b="1" dirty="0">
                 <a:solidFill>
                   <a:srgbClr val="1F285A"/>
                 </a:solidFill>
                 <a:latin typeface="メイリオ" panose="020B0604030504040204" pitchFamily="50" charset="-128"/>
                 <a:ea typeface="メイリオ" panose="020B0604030504040204" pitchFamily="50" charset="-128"/>
               </a:rPr>
-              <a:t>月額料金（税込）｜上位プランほど、配信数と使える機能が増えます</a:t>
-            </a:r>
-            <a:endParaRPr lang="ja-JP" altLang="en-US" sz="1250" dirty="0"/>
+              <a:t>月額料金（税込）｜上位プランほど機能が増えます</a:t>
+            </a:r>
+            <a:endParaRPr lang="ja-JP" altLang="en-US" sz="1300" dirty="0"/>
           </a:p>
         </p:txBody>
       </p:sp>
@@ -3696,8 +3528,8 @@
         </p:nvSpPr>
         <p:spPr>
           <a:xfrm>
-            <a:off x="429768" y="3803904"/>
-            <a:ext cx="2135124" cy="292608"/>
+            <a:off x="429768" y="3968496"/>
+            <a:ext cx="2135124" cy="347472"/>
           </a:xfrm>
           <a:prstGeom prst="roundRect">
             <a:avLst>
@@ -3723,7 +3555,7 @@
               <a:buNone/>
             </a:pPr>
             <a:r>
-              <a:rPr lang="ja-JP" altLang="en-US" sz="1300" b="1" dirty="0">
+              <a:rPr lang="ja-JP" altLang="en-US" sz="1400" b="1" dirty="0">
                 <a:solidFill>
                   <a:srgbClr val="FFFFFF"/>
                 </a:solidFill>
@@ -3732,7 +3564,7 @@
               </a:rPr>
               <a:t>フリープラン</a:t>
             </a:r>
-            <a:endParaRPr lang="ja-JP" altLang="en-US" sz="1300" dirty="0"/>
+            <a:endParaRPr lang="ja-JP" altLang="en-US" sz="1400" dirty="0"/>
           </a:p>
         </p:txBody>
       </p:sp>
@@ -3744,8 +3576,8 @@
         </p:nvSpPr>
         <p:spPr>
           <a:xfrm>
-            <a:off x="429768" y="4133087"/>
-            <a:ext cx="2135124" cy="1499616"/>
+            <a:off x="429768" y="4352544"/>
+            <a:ext cx="2135124" cy="1170432"/>
           </a:xfrm>
           <a:prstGeom prst="roundRect">
             <a:avLst>
@@ -3762,7 +3594,7 @@
           </a:ln>
         </p:spPr>
         <p:txBody>
-          <a:bodyPr wrap="square" lIns="73152" tIns="36576" rIns="73152" bIns="36576" rtlCol="0" anchor="t">
+          <a:bodyPr wrap="square" lIns="73152" tIns="45720" rIns="73152" bIns="36576" rtlCol="0" anchor="t">
             <a:noAutofit/>
           </a:bodyPr>
           <a:lstStyle/>
@@ -3774,7 +3606,7 @@
               <a:buNone/>
             </a:pPr>
             <a:r>
-              <a:rPr lang="ja-JP" altLang="en-US" sz="2100" b="1" dirty="0">
+              <a:rPr lang="ja-JP" altLang="en-US" sz="2600" b="1" dirty="0">
                 <a:solidFill>
                   <a:srgbClr val="1F285A"/>
                 </a:solidFill>
@@ -3784,7 +3616,7 @@
               <a:t>0</a:t>
             </a:r>
             <a:r>
-              <a:rPr lang="ja-JP" altLang="en-US" sz="1300" b="1" dirty="0">
+              <a:rPr lang="ja-JP" altLang="en-US" sz="1500" b="1" dirty="0">
                 <a:solidFill>
                   <a:srgbClr val="1F285A"/>
                 </a:solidFill>
@@ -3794,7 +3626,7 @@
               <a:t>円</a:t>
             </a:r>
             <a:r>
-              <a:rPr lang="ja-JP" altLang="en-US" sz="1050" b="0" dirty="0">
+              <a:rPr lang="ja-JP" altLang="en-US" sz="1100" b="0" dirty="0">
                 <a:solidFill>
                   <a:srgbClr val="5A6378"/>
                 </a:solidFill>
@@ -3803,7 +3635,7 @@
               </a:rPr>
               <a:t>／月</a:t>
             </a:r>
-            <a:endParaRPr lang="ja-JP" altLang="en-US" sz="1050" dirty="0"/>
+            <a:endParaRPr lang="ja-JP" altLang="en-US" sz="1200" dirty="0"/>
           </a:p>
           <a:p>
             <a:pPr algn="ctr">
@@ -3813,83 +3645,35 @@
               <a:buNone/>
             </a:pPr>
             <a:r>
-              <a:rPr lang="ja-JP" altLang="en-US" sz="1050" b="0" dirty="0">
-                <a:solidFill>
-                  <a:srgbClr val="5A6378"/>
+              <a:rPr lang="ja-JP" altLang="en-US" sz="1200" b="1" dirty="0">
+                <a:solidFill>
+                  <a:srgbClr val="333333"/>
                 </a:solidFill>
                 <a:latin typeface="メイリオ" panose="020B0604030504040204" pitchFamily="50" charset="-128"/>
                 <a:ea typeface="メイリオ" panose="020B0604030504040204" pitchFamily="50" charset="-128"/>
               </a:rPr>
-              <a:t>月の配信数 </a:t>
-            </a:r>
-            <a:r>
-              <a:rPr lang="ja-JP" altLang="en-US" sz="1200" b="1" dirty="0">
-                <a:solidFill>
-                  <a:srgbClr val="333333"/>
-                </a:solidFill>
-                <a:latin typeface="メイリオ" panose="020B0604030504040204" pitchFamily="50" charset="-128"/>
-                <a:ea typeface="メイリオ" panose="020B0604030504040204" pitchFamily="50" charset="-128"/>
-              </a:rPr>
-              <a:t>〜200通</a:t>
-            </a:r>
-            <a:endParaRPr lang="ja-JP" altLang="en-US" sz="1050" dirty="0"/>
+              <a:t>月200通まで</a:t>
+            </a:r>
+            <a:endParaRPr lang="ja-JP" altLang="en-US" sz="1200" dirty="0"/>
           </a:p>
           <a:p>
             <a:pPr algn="ctr">
               <a:spcBef>
-                <a:spcPts val="400"/>
+                <a:spcPts val="300"/>
               </a:spcBef>
               <a:buNone/>
             </a:pPr>
             <a:r>
-              <a:rPr lang="ja-JP" altLang="en-US" sz="1100" b="1" dirty="0">
-                <a:solidFill>
-                  <a:srgbClr val="1F285A"/>
+              <a:rPr lang="ja-JP" altLang="en-US" sz="1100" b="0" dirty="0">
+                <a:solidFill>
+                  <a:srgbClr val="5A6378"/>
                 </a:solidFill>
                 <a:latin typeface="メイリオ" panose="020B0604030504040204" pitchFamily="50" charset="-128"/>
                 <a:ea typeface="メイリオ" panose="020B0604030504040204" pitchFamily="50" charset="-128"/>
               </a:rPr>
-              <a:t>まずは気軽に試したい方</a:t>
-            </a:r>
-            <a:endParaRPr lang="ja-JP" altLang="en-US" sz="1050" dirty="0"/>
-          </a:p>
-          <a:p>
-            <a:pPr algn="ctr">
-              <a:spcBef>
-                <a:spcPts val="200"/>
-              </a:spcBef>
-              <a:buNone/>
-            </a:pPr>
-            <a:r>
-              <a:rPr lang="ja-JP" altLang="en-US" sz="1000" b="0" dirty="0">
-                <a:solidFill>
-                  <a:srgbClr val="333333"/>
-                </a:solidFill>
-                <a:latin typeface="メイリオ" panose="020B0604030504040204" pitchFamily="50" charset="-128"/>
-                <a:ea typeface="メイリオ" panose="020B0604030504040204" pitchFamily="50" charset="-128"/>
-              </a:rPr>
-              <a:t>基本機能（自動応答など）</a:t>
-            </a:r>
-            <a:br>
-              <a:rPr lang="ja-JP" altLang="en-US" sz="1000" b="0" dirty="0">
-                <a:solidFill>
-                  <a:srgbClr val="333333"/>
-                </a:solidFill>
-                <a:latin typeface="メイリオ" panose="020B0604030504040204" pitchFamily="50" charset="-128"/>
-                <a:ea typeface="メイリオ" panose="020B0604030504040204" pitchFamily="50" charset="-128"/>
-              </a:rPr>
-            </a:br>
-            <a:r>
-              <a:rPr lang="ja-JP" altLang="en-US" sz="1000" b="0" dirty="0">
-                <a:solidFill>
-                  <a:srgbClr val="333333"/>
-                </a:solidFill>
-                <a:latin typeface="メイリオ" panose="020B0604030504040204" pitchFamily="50" charset="-128"/>
-                <a:ea typeface="メイリオ" panose="020B0604030504040204" pitchFamily="50" charset="-128"/>
-              </a:rPr>
-              <a:t>※1社1アカウントまで</a:t>
-            </a:r>
-            <a:endParaRPr lang="ja-JP" altLang="en-US" sz="1050" dirty="0"/>
+              <a:t>まずはお試し</a:t>
+            </a:r>
+            <a:endParaRPr lang="ja-JP" altLang="en-US" sz="1200" dirty="0"/>
           </a:p>
         </p:txBody>
       </p:sp>
@@ -3901,8 +3685,8 @@
         </p:nvSpPr>
         <p:spPr>
           <a:xfrm>
-            <a:off x="2692908" y="3803904"/>
-            <a:ext cx="2135124" cy="292608"/>
+            <a:off x="2692908" y="3968496"/>
+            <a:ext cx="2135124" cy="347472"/>
           </a:xfrm>
           <a:prstGeom prst="roundRect">
             <a:avLst>
@@ -3928,7 +3712,7 @@
               <a:buNone/>
             </a:pPr>
             <a:r>
-              <a:rPr lang="ja-JP" altLang="en-US" sz="1300" b="1" dirty="0">
+              <a:rPr lang="ja-JP" altLang="en-US" sz="1400" b="1" dirty="0">
                 <a:solidFill>
                   <a:srgbClr val="FFFFFF"/>
                 </a:solidFill>
@@ -3937,7 +3721,7 @@
               </a:rPr>
               <a:t>スタートプラン</a:t>
             </a:r>
-            <a:endParaRPr lang="ja-JP" altLang="en-US" sz="1300" dirty="0"/>
+            <a:endParaRPr lang="ja-JP" altLang="en-US" sz="1400" dirty="0"/>
           </a:p>
         </p:txBody>
       </p:sp>
@@ -3949,8 +3733,8 @@
         </p:nvSpPr>
         <p:spPr>
           <a:xfrm>
-            <a:off x="2692908" y="4133087"/>
-            <a:ext cx="2135124" cy="1499616"/>
+            <a:off x="2692908" y="4352544"/>
+            <a:ext cx="2135124" cy="1170432"/>
           </a:xfrm>
           <a:prstGeom prst="roundRect">
             <a:avLst>
@@ -3967,7 +3751,7 @@
           </a:ln>
         </p:spPr>
         <p:txBody>
-          <a:bodyPr wrap="square" lIns="73152" tIns="36576" rIns="73152" bIns="36576" rtlCol="0" anchor="t">
+          <a:bodyPr wrap="square" lIns="73152" tIns="45720" rIns="73152" bIns="36576" rtlCol="0" anchor="t">
             <a:noAutofit/>
           </a:bodyPr>
           <a:lstStyle/>
@@ -3979,7 +3763,7 @@
               <a:buNone/>
             </a:pPr>
             <a:r>
-              <a:rPr lang="ja-JP" altLang="en-US" sz="2100" b="1" dirty="0">
+              <a:rPr lang="ja-JP" altLang="en-US" sz="2600" b="1" dirty="0">
                 <a:solidFill>
                   <a:srgbClr val="1F285A"/>
                 </a:solidFill>
@@ -3989,7 +3773,7 @@
               <a:t>5,000</a:t>
             </a:r>
             <a:r>
-              <a:rPr lang="ja-JP" altLang="en-US" sz="1300" b="1" dirty="0">
+              <a:rPr lang="ja-JP" altLang="en-US" sz="1500" b="1" dirty="0">
                 <a:solidFill>
                   <a:srgbClr val="1F285A"/>
                 </a:solidFill>
@@ -3999,7 +3783,7 @@
               <a:t>円</a:t>
             </a:r>
             <a:r>
-              <a:rPr lang="ja-JP" altLang="en-US" sz="1050" b="0" dirty="0">
+              <a:rPr lang="ja-JP" altLang="en-US" sz="1100" b="0" dirty="0">
                 <a:solidFill>
                   <a:srgbClr val="5A6378"/>
                 </a:solidFill>
@@ -4008,7 +3792,7 @@
               </a:rPr>
               <a:t>／月</a:t>
             </a:r>
-            <a:endParaRPr lang="ja-JP" altLang="en-US" sz="1050" dirty="0"/>
+            <a:endParaRPr lang="ja-JP" altLang="en-US" sz="1200" dirty="0"/>
           </a:p>
           <a:p>
             <a:pPr algn="ctr">
@@ -4018,83 +3802,35 @@
               <a:buNone/>
             </a:pPr>
             <a:r>
-              <a:rPr lang="ja-JP" altLang="en-US" sz="1050" b="0" dirty="0">
-                <a:solidFill>
-                  <a:srgbClr val="5A6378"/>
+              <a:rPr lang="ja-JP" altLang="en-US" sz="1200" b="1" dirty="0">
+                <a:solidFill>
+                  <a:srgbClr val="333333"/>
                 </a:solidFill>
                 <a:latin typeface="メイリオ" panose="020B0604030504040204" pitchFamily="50" charset="-128"/>
                 <a:ea typeface="メイリオ" panose="020B0604030504040204" pitchFamily="50" charset="-128"/>
               </a:rPr>
-              <a:t>月の配信数 </a:t>
-            </a:r>
-            <a:r>
-              <a:rPr lang="ja-JP" altLang="en-US" sz="1200" b="1" dirty="0">
-                <a:solidFill>
-                  <a:srgbClr val="333333"/>
-                </a:solidFill>
-                <a:latin typeface="メイリオ" panose="020B0604030504040204" pitchFamily="50" charset="-128"/>
-                <a:ea typeface="メイリオ" panose="020B0604030504040204" pitchFamily="50" charset="-128"/>
-              </a:rPr>
-              <a:t>〜5,000通</a:t>
-            </a:r>
-            <a:endParaRPr lang="ja-JP" altLang="en-US" sz="1050" dirty="0"/>
+              <a:t>月5,000通まで</a:t>
+            </a:r>
+            <a:endParaRPr lang="ja-JP" altLang="en-US" sz="1200" dirty="0"/>
           </a:p>
           <a:p>
             <a:pPr algn="ctr">
               <a:spcBef>
-                <a:spcPts val="400"/>
+                <a:spcPts val="300"/>
               </a:spcBef>
               <a:buNone/>
             </a:pPr>
             <a:r>
-              <a:rPr lang="ja-JP" altLang="en-US" sz="1100" b="1" dirty="0">
-                <a:solidFill>
-                  <a:srgbClr val="1F285A"/>
+              <a:rPr lang="ja-JP" altLang="en-US" sz="1100" b="0" dirty="0">
+                <a:solidFill>
+                  <a:srgbClr val="5A6378"/>
                 </a:solidFill>
                 <a:latin typeface="メイリオ" panose="020B0604030504040204" pitchFamily="50" charset="-128"/>
                 <a:ea typeface="メイリオ" panose="020B0604030504040204" pitchFamily="50" charset="-128"/>
               </a:rPr>
-              <a:t>小さく始めたい方</a:t>
-            </a:r>
-            <a:endParaRPr lang="ja-JP" altLang="en-US" sz="1050" dirty="0"/>
-          </a:p>
-          <a:p>
-            <a:pPr algn="ctr">
-              <a:spcBef>
-                <a:spcPts val="200"/>
-              </a:spcBef>
-              <a:buNone/>
-            </a:pPr>
-            <a:r>
-              <a:rPr lang="ja-JP" altLang="en-US" sz="1000" b="0" dirty="0">
-                <a:solidFill>
-                  <a:srgbClr val="333333"/>
-                </a:solidFill>
-                <a:latin typeface="メイリオ" panose="020B0604030504040204" pitchFamily="50" charset="-128"/>
-                <a:ea typeface="メイリオ" panose="020B0604030504040204" pitchFamily="50" charset="-128"/>
-              </a:rPr>
-              <a:t>＋Lフレックス</a:t>
-            </a:r>
-            <a:br>
-              <a:rPr lang="ja-JP" altLang="en-US" sz="1000" b="0" dirty="0">
-                <a:solidFill>
-                  <a:srgbClr val="333333"/>
-                </a:solidFill>
-                <a:latin typeface="メイリオ" panose="020B0604030504040204" pitchFamily="50" charset="-128"/>
-                <a:ea typeface="メイリオ" panose="020B0604030504040204" pitchFamily="50" charset="-128"/>
-              </a:rPr>
-            </a:br>
-            <a:r>
-              <a:rPr lang="ja-JP" altLang="en-US" sz="1000" b="0" dirty="0">
-                <a:solidFill>
-                  <a:srgbClr val="333333"/>
-                </a:solidFill>
-                <a:latin typeface="メイリオ" panose="020B0604030504040204" pitchFamily="50" charset="-128"/>
-                <a:ea typeface="メイリオ" panose="020B0604030504040204" pitchFamily="50" charset="-128"/>
-              </a:rPr>
-              <a:t>（デザイン自由なメッセージ）</a:t>
-            </a:r>
-            <a:endParaRPr lang="ja-JP" altLang="en-US" sz="1050" dirty="0"/>
+              <a:t>小さく始める</a:t>
+            </a:r>
+            <a:endParaRPr lang="ja-JP" altLang="en-US" sz="1200" dirty="0"/>
           </a:p>
         </p:txBody>
       </p:sp>
@@ -4106,8 +3842,8 @@
         </p:nvSpPr>
         <p:spPr>
           <a:xfrm>
-            <a:off x="4956048" y="3803904"/>
-            <a:ext cx="2135124" cy="292608"/>
+            <a:off x="4956048" y="3968496"/>
+            <a:ext cx="2135124" cy="347472"/>
           </a:xfrm>
           <a:prstGeom prst="roundRect">
             <a:avLst>
@@ -4133,7 +3869,7 @@
               <a:buNone/>
             </a:pPr>
             <a:r>
-              <a:rPr lang="ja-JP" altLang="en-US" sz="1300" b="1" dirty="0">
+              <a:rPr lang="ja-JP" altLang="en-US" sz="1400" b="1" dirty="0">
                 <a:solidFill>
                   <a:srgbClr val="FFFFFF"/>
                 </a:solidFill>
@@ -4142,7 +3878,7 @@
               </a:rPr>
               <a:t>スタンダードプラン</a:t>
             </a:r>
-            <a:endParaRPr lang="ja-JP" altLang="en-US" sz="1300" dirty="0"/>
+            <a:endParaRPr lang="ja-JP" altLang="en-US" sz="1400" dirty="0"/>
           </a:p>
         </p:txBody>
       </p:sp>
@@ -4154,8 +3890,8 @@
         </p:nvSpPr>
         <p:spPr>
           <a:xfrm>
-            <a:off x="4956048" y="4133087"/>
-            <a:ext cx="2135124" cy="1499616"/>
+            <a:off x="4956048" y="4352544"/>
+            <a:ext cx="2135124" cy="1170432"/>
           </a:xfrm>
           <a:prstGeom prst="roundRect">
             <a:avLst>
@@ -4172,7 +3908,7 @@
           </a:ln>
         </p:spPr>
         <p:txBody>
-          <a:bodyPr wrap="square" lIns="73152" tIns="36576" rIns="73152" bIns="36576" rtlCol="0" anchor="t">
+          <a:bodyPr wrap="square" lIns="73152" tIns="45720" rIns="73152" bIns="36576" rtlCol="0" anchor="t">
             <a:noAutofit/>
           </a:bodyPr>
           <a:lstStyle/>
@@ -4184,7 +3920,7 @@
               <a:buNone/>
             </a:pPr>
             <a:r>
-              <a:rPr lang="ja-JP" altLang="en-US" sz="2100" b="1" dirty="0">
+              <a:rPr lang="ja-JP" altLang="en-US" sz="2600" b="1" dirty="0">
                 <a:solidFill>
                   <a:srgbClr val="1F285A"/>
                 </a:solidFill>
@@ -4194,7 +3930,7 @@
               <a:t>21,780</a:t>
             </a:r>
             <a:r>
-              <a:rPr lang="ja-JP" altLang="en-US" sz="1300" b="1" dirty="0">
+              <a:rPr lang="ja-JP" altLang="en-US" sz="1500" b="1" dirty="0">
                 <a:solidFill>
                   <a:srgbClr val="1F285A"/>
                 </a:solidFill>
@@ -4204,7 +3940,7 @@
               <a:t>円</a:t>
             </a:r>
             <a:r>
-              <a:rPr lang="ja-JP" altLang="en-US" sz="1050" b="0" dirty="0">
+              <a:rPr lang="ja-JP" altLang="en-US" sz="1100" b="0" dirty="0">
                 <a:solidFill>
                   <a:srgbClr val="5A6378"/>
                 </a:solidFill>
@@ -4213,7 +3949,7 @@
               </a:rPr>
               <a:t>／月</a:t>
             </a:r>
-            <a:endParaRPr lang="ja-JP" altLang="en-US" sz="1050" dirty="0"/>
+            <a:endParaRPr lang="ja-JP" altLang="en-US" sz="1200" dirty="0"/>
           </a:p>
           <a:p>
             <a:pPr algn="ctr">
@@ -4223,83 +3959,35 @@
               <a:buNone/>
             </a:pPr>
             <a:r>
-              <a:rPr lang="ja-JP" altLang="en-US" sz="1050" b="0" dirty="0">
-                <a:solidFill>
-                  <a:srgbClr val="5A6378"/>
+              <a:rPr lang="ja-JP" altLang="en-US" sz="1200" b="1" dirty="0">
+                <a:solidFill>
+                  <a:srgbClr val="333333"/>
                 </a:solidFill>
                 <a:latin typeface="メイリオ" panose="020B0604030504040204" pitchFamily="50" charset="-128"/>
                 <a:ea typeface="メイリオ" panose="020B0604030504040204" pitchFamily="50" charset="-128"/>
               </a:rPr>
-              <a:t>月の配信数 </a:t>
-            </a:r>
-            <a:r>
-              <a:rPr lang="ja-JP" altLang="en-US" sz="1200" b="1" dirty="0">
-                <a:solidFill>
-                  <a:srgbClr val="333333"/>
-                </a:solidFill>
-                <a:latin typeface="メイリオ" panose="020B0604030504040204" pitchFamily="50" charset="-128"/>
-                <a:ea typeface="メイリオ" panose="020B0604030504040204" pitchFamily="50" charset="-128"/>
-              </a:rPr>
-              <a:t>〜30,000通</a:t>
-            </a:r>
-            <a:endParaRPr lang="ja-JP" altLang="en-US" sz="1050" dirty="0"/>
+              <a:t>月30,000通まで</a:t>
+            </a:r>
+            <a:endParaRPr lang="ja-JP" altLang="en-US" sz="1200" dirty="0"/>
           </a:p>
           <a:p>
             <a:pPr algn="ctr">
               <a:spcBef>
-                <a:spcPts val="400"/>
+                <a:spcPts val="300"/>
               </a:spcBef>
               <a:buNone/>
             </a:pPr>
             <a:r>
-              <a:rPr lang="ja-JP" altLang="en-US" sz="1100" b="1" dirty="0">
-                <a:solidFill>
-                  <a:srgbClr val="1F285A"/>
+              <a:rPr lang="ja-JP" altLang="en-US" sz="1100" b="0" dirty="0">
+                <a:solidFill>
+                  <a:srgbClr val="5A6378"/>
                 </a:solidFill>
                 <a:latin typeface="メイリオ" panose="020B0604030504040204" pitchFamily="50" charset="-128"/>
                 <a:ea typeface="メイリオ" panose="020B0604030504040204" pitchFamily="50" charset="-128"/>
               </a:rPr>
-              <a:t>リッチメニューも使いたい方</a:t>
-            </a:r>
-            <a:endParaRPr lang="ja-JP" altLang="en-US" sz="1050" dirty="0"/>
-          </a:p>
-          <a:p>
-            <a:pPr algn="ctr">
-              <a:spcBef>
-                <a:spcPts val="200"/>
-              </a:spcBef>
-              <a:buNone/>
-            </a:pPr>
-            <a:r>
-              <a:rPr lang="ja-JP" altLang="en-US" sz="1000" b="0" dirty="0">
-                <a:solidFill>
-                  <a:srgbClr val="333333"/>
-                </a:solidFill>
-                <a:latin typeface="メイリオ" panose="020B0604030504040204" pitchFamily="50" charset="-128"/>
-                <a:ea typeface="メイリオ" panose="020B0604030504040204" pitchFamily="50" charset="-128"/>
-              </a:rPr>
-              <a:t>＋リッチメニューの出し分け</a:t>
-            </a:r>
-            <a:br>
-              <a:rPr lang="ja-JP" altLang="en-US" sz="1000" b="0" dirty="0">
-                <a:solidFill>
-                  <a:srgbClr val="333333"/>
-                </a:solidFill>
-                <a:latin typeface="メイリオ" panose="020B0604030504040204" pitchFamily="50" charset="-128"/>
-                <a:ea typeface="メイリオ" panose="020B0604030504040204" pitchFamily="50" charset="-128"/>
-              </a:rPr>
-            </a:br>
-            <a:r>
-              <a:rPr lang="ja-JP" altLang="en-US" sz="1000" b="0" dirty="0">
-                <a:solidFill>
-                  <a:srgbClr val="333333"/>
-                </a:solidFill>
-                <a:latin typeface="メイリオ" panose="020B0604030504040204" pitchFamily="50" charset="-128"/>
-                <a:ea typeface="メイリオ" panose="020B0604030504040204" pitchFamily="50" charset="-128"/>
-              </a:rPr>
-              <a:t>＋URLクリック測定</a:t>
-            </a:r>
-            <a:endParaRPr lang="ja-JP" altLang="en-US" sz="1050" dirty="0"/>
+              <a:t>本格的に運用</a:t>
+            </a:r>
+            <a:endParaRPr lang="ja-JP" altLang="en-US" sz="1200" dirty="0"/>
           </a:p>
         </p:txBody>
       </p:sp>
@@ -4311,8 +3999,8 @@
         </p:nvSpPr>
         <p:spPr>
           <a:xfrm>
-            <a:off x="7219188" y="3803904"/>
-            <a:ext cx="2135124" cy="292608"/>
+            <a:off x="7219188" y="3968496"/>
+            <a:ext cx="2135124" cy="347472"/>
           </a:xfrm>
           <a:prstGeom prst="roundRect">
             <a:avLst>
@@ -4338,7 +4026,7 @@
               <a:buNone/>
             </a:pPr>
             <a:r>
-              <a:rPr lang="ja-JP" altLang="en-US" sz="1300" b="1" dirty="0">
+              <a:rPr lang="ja-JP" altLang="en-US" sz="1400" b="1" dirty="0">
                 <a:solidFill>
                   <a:srgbClr val="FFFFFF"/>
                 </a:solidFill>
@@ -4347,7 +4035,7 @@
               </a:rPr>
               <a:t>プロプラン</a:t>
             </a:r>
-            <a:endParaRPr lang="ja-JP" altLang="en-US" sz="1300" dirty="0"/>
+            <a:endParaRPr lang="ja-JP" altLang="en-US" sz="1400" dirty="0"/>
           </a:p>
         </p:txBody>
       </p:sp>
@@ -4359,8 +4047,8 @@
         </p:nvSpPr>
         <p:spPr>
           <a:xfrm>
-            <a:off x="7219188" y="4133087"/>
-            <a:ext cx="2135124" cy="1499616"/>
+            <a:off x="7219188" y="4352544"/>
+            <a:ext cx="2135124" cy="1170432"/>
           </a:xfrm>
           <a:prstGeom prst="roundRect">
             <a:avLst>
@@ -4377,7 +4065,7 @@
           </a:ln>
         </p:spPr>
         <p:txBody>
-          <a:bodyPr wrap="square" lIns="73152" tIns="36576" rIns="73152" bIns="36576" rtlCol="0" anchor="t">
+          <a:bodyPr wrap="square" lIns="73152" tIns="45720" rIns="73152" bIns="36576" rtlCol="0" anchor="t">
             <a:noAutofit/>
           </a:bodyPr>
           <a:lstStyle/>
@@ -4389,7 +4077,7 @@
               <a:buNone/>
             </a:pPr>
             <a:r>
-              <a:rPr lang="ja-JP" altLang="en-US" sz="2100" b="1" dirty="0">
+              <a:rPr lang="ja-JP" altLang="en-US" sz="2600" b="1" dirty="0">
                 <a:solidFill>
                   <a:srgbClr val="1F285A"/>
                 </a:solidFill>
@@ -4399,7 +4087,7 @@
               <a:t>32,780</a:t>
             </a:r>
             <a:r>
-              <a:rPr lang="ja-JP" altLang="en-US" sz="1300" b="1" dirty="0">
+              <a:rPr lang="ja-JP" altLang="en-US" sz="1500" b="1" dirty="0">
                 <a:solidFill>
                   <a:srgbClr val="1F285A"/>
                 </a:solidFill>
@@ -4409,7 +4097,7 @@
               <a:t>円</a:t>
             </a:r>
             <a:r>
-              <a:rPr lang="ja-JP" altLang="en-US" sz="1050" b="0" dirty="0">
+              <a:rPr lang="ja-JP" altLang="en-US" sz="1100" b="0" dirty="0">
                 <a:solidFill>
                   <a:srgbClr val="5A6378"/>
                 </a:solidFill>
@@ -4418,7 +4106,7 @@
               </a:rPr>
               <a:t>／月</a:t>
             </a:r>
-            <a:endParaRPr lang="ja-JP" altLang="en-US" sz="1050" dirty="0"/>
+            <a:endParaRPr lang="ja-JP" altLang="en-US" sz="1200" dirty="0"/>
           </a:p>
           <a:p>
             <a:pPr algn="ctr">
@@ -4428,83 +4116,35 @@
               <a:buNone/>
             </a:pPr>
             <a:r>
-              <a:rPr lang="ja-JP" altLang="en-US" sz="1050" b="0" dirty="0">
-                <a:solidFill>
-                  <a:srgbClr val="5A6378"/>
+              <a:rPr lang="ja-JP" altLang="en-US" sz="1200" b="1" dirty="0">
+                <a:solidFill>
+                  <a:srgbClr val="333333"/>
                 </a:solidFill>
                 <a:latin typeface="メイリオ" panose="020B0604030504040204" pitchFamily="50" charset="-128"/>
                 <a:ea typeface="メイリオ" panose="020B0604030504040204" pitchFamily="50" charset="-128"/>
               </a:rPr>
-              <a:t>月の配信数 </a:t>
-            </a:r>
-            <a:r>
-              <a:rPr lang="ja-JP" altLang="en-US" sz="1200" b="1" dirty="0">
-                <a:solidFill>
-                  <a:srgbClr val="333333"/>
-                </a:solidFill>
-                <a:latin typeface="メイリオ" panose="020B0604030504040204" pitchFamily="50" charset="-128"/>
-                <a:ea typeface="メイリオ" panose="020B0604030504040204" pitchFamily="50" charset="-128"/>
-              </a:rPr>
-              <a:t>〜50,000通</a:t>
-            </a:r>
-            <a:endParaRPr lang="ja-JP" altLang="en-US" sz="1050" dirty="0"/>
+              <a:t>月50,000通まで</a:t>
+            </a:r>
+            <a:endParaRPr lang="ja-JP" altLang="en-US" sz="1200" dirty="0"/>
           </a:p>
           <a:p>
             <a:pPr algn="ctr">
               <a:spcBef>
-                <a:spcPts val="400"/>
+                <a:spcPts val="300"/>
               </a:spcBef>
               <a:buNone/>
             </a:pPr>
             <a:r>
-              <a:rPr lang="ja-JP" altLang="en-US" sz="1100" b="1" dirty="0">
-                <a:solidFill>
-                  <a:srgbClr val="1F285A"/>
+              <a:rPr lang="ja-JP" altLang="en-US" sz="1100" b="0" dirty="0">
+                <a:solidFill>
+                  <a:srgbClr val="5A6378"/>
                 </a:solidFill>
                 <a:latin typeface="メイリオ" panose="020B0604030504040204" pitchFamily="50" charset="-128"/>
                 <a:ea typeface="メイリオ" panose="020B0604030504040204" pitchFamily="50" charset="-128"/>
               </a:rPr>
-              <a:t>分析まで使いこなしたい方</a:t>
-            </a:r>
-            <a:endParaRPr lang="ja-JP" altLang="en-US" sz="1050" dirty="0"/>
-          </a:p>
-          <a:p>
-            <a:pPr algn="ctr">
-              <a:spcBef>
-                <a:spcPts val="200"/>
-              </a:spcBef>
-              <a:buNone/>
-            </a:pPr>
-            <a:r>
-              <a:rPr lang="ja-JP" altLang="en-US" sz="1000" b="0" dirty="0">
-                <a:solidFill>
-                  <a:srgbClr val="333333"/>
-                </a:solidFill>
-                <a:latin typeface="メイリオ" panose="020B0604030504040204" pitchFamily="50" charset="-128"/>
-                <a:ea typeface="メイリオ" panose="020B0604030504040204" pitchFamily="50" charset="-128"/>
-              </a:rPr>
-              <a:t>＋流入経路分析・ファネル分析</a:t>
-            </a:r>
-            <a:br>
-              <a:rPr lang="ja-JP" altLang="en-US" sz="1000" b="0" dirty="0">
-                <a:solidFill>
-                  <a:srgbClr val="333333"/>
-                </a:solidFill>
-                <a:latin typeface="メイリオ" panose="020B0604030504040204" pitchFamily="50" charset="-128"/>
-                <a:ea typeface="メイリオ" panose="020B0604030504040204" pitchFamily="50" charset="-128"/>
-              </a:rPr>
-            </a:br>
-            <a:r>
-              <a:rPr lang="ja-JP" altLang="en-US" sz="1000" b="0" dirty="0">
-                <a:solidFill>
-                  <a:srgbClr val="333333"/>
-                </a:solidFill>
-                <a:latin typeface="メイリオ" panose="020B0604030504040204" pitchFamily="50" charset="-128"/>
-                <a:ea typeface="メイリオ" panose="020B0604030504040204" pitchFamily="50" charset="-128"/>
-              </a:rPr>
-              <a:t>＋広告連携など（全機能）</a:t>
-            </a:r>
-            <a:endParaRPr lang="ja-JP" altLang="en-US" sz="1050" dirty="0"/>
+              <a:t>分析まで全機能</a:t>
+            </a:r>
+            <a:endParaRPr lang="ja-JP" altLang="en-US" sz="1200" dirty="0"/>
           </a:p>
         </p:txBody>
       </p:sp>
@@ -4516,8 +4156,8 @@
         </p:nvSpPr>
         <p:spPr>
           <a:xfrm>
-            <a:off x="429768" y="5687568"/>
-            <a:ext cx="8924544" cy="786384"/>
+            <a:off x="429768" y="5614416"/>
+            <a:ext cx="8924544" cy="749808"/>
           </a:xfrm>
           <a:prstGeom prst="rect">
             <a:avLst/>
@@ -4537,65 +4177,49 @@
               <a:buNone/>
             </a:pPr>
             <a:r>
-              <a:rPr lang="ja-JP" altLang="en-US" sz="1000" b="1" dirty="0">
+              <a:rPr lang="ja-JP" altLang="en-US" sz="1100" b="1" dirty="0">
                 <a:solidFill>
                   <a:srgbClr val="1F285A"/>
                 </a:solidFill>
                 <a:latin typeface="メイリオ" panose="020B0604030504040204" pitchFamily="50" charset="-128"/>
                 <a:ea typeface="メイリオ" panose="020B0604030504040204" pitchFamily="50" charset="-128"/>
               </a:rPr>
-              <a:t>※別途、LINE公式アカウントの月額費用がかかります。配信数は、LINE公式アカウント側の上限までとなります。</a:t>
-            </a:r>
-            <a:endParaRPr lang="ja-JP" altLang="en-US" sz="1000" dirty="0"/>
+              <a:t>※別途、LINE公式アカウントの月額費用がかかります。</a:t>
+            </a:r>
+            <a:endParaRPr lang="ja-JP" altLang="en-US" sz="1100" dirty="0"/>
           </a:p>
           <a:p>
             <a:pPr algn="l">
               <a:buNone/>
             </a:pPr>
             <a:r>
-              <a:rPr lang="ja-JP" altLang="en-US" sz="1000" b="0" dirty="0">
+              <a:rPr lang="ja-JP" altLang="en-US" sz="1100" b="0" dirty="0">
                 <a:solidFill>
                   <a:srgbClr val="444444"/>
                 </a:solidFill>
                 <a:latin typeface="メイリオ" panose="020B0604030504040204" pitchFamily="50" charset="-128"/>
                 <a:ea typeface="メイリオ" panose="020B0604030504040204" pitchFamily="50" charset="-128"/>
               </a:rPr>
-              <a:t>※初期費用0円・初月料金0円（新規ご契約のみ）。表示価格は税込。課金後の解約は3か月後（3回課金後）から可能です。</a:t>
-            </a:r>
-            <a:endParaRPr lang="ja-JP" altLang="en-US" sz="1000" dirty="0"/>
+              <a:t>※初期費用0円／表示価格は税込／解約は3か月後（3回課金後）から可能です。</a:t>
+            </a:r>
+            <a:endParaRPr lang="ja-JP" altLang="en-US" sz="1100" dirty="0"/>
           </a:p>
           <a:p>
             <a:pPr algn="l">
               <a:buNone/>
             </a:pPr>
             <a:r>
-              <a:rPr lang="ja-JP" altLang="en-US" sz="1000" b="0" dirty="0">
+              <a:rPr lang="ja-JP" altLang="en-US" sz="1100" b="0" dirty="0">
                 <a:solidFill>
                   <a:srgbClr val="444444"/>
                 </a:solidFill>
                 <a:latin typeface="メイリオ" panose="020B0604030504040204" pitchFamily="50" charset="-128"/>
                 <a:ea typeface="メイリオ" panose="020B0604030504040204" pitchFamily="50" charset="-128"/>
               </a:rPr>
-              <a:t>※初期設定サポートは無料。有料オプション：Webhook転送 月5,500円／API連携（プロプラン以上）月11,000円。</a:t>
-            </a:r>
-            <a:endParaRPr lang="ja-JP" altLang="en-US" sz="1000" dirty="0"/>
-          </a:p>
-          <a:p>
-            <a:pPr algn="l">
-              <a:buNone/>
-            </a:pPr>
-            <a:r>
-              <a:rPr lang="ja-JP" altLang="en-US" sz="1000" b="0" dirty="0">
-                <a:solidFill>
-                  <a:srgbClr val="444444"/>
-                </a:solidFill>
-                <a:latin typeface="メイリオ" panose="020B0604030504040204" pitchFamily="50" charset="-128"/>
-                <a:ea typeface="メイリオ" panose="020B0604030504040204" pitchFamily="50" charset="-128"/>
-              </a:rPr>
               <a:t>出典：</a:t>
             </a:r>
             <a:r>
-              <a:rPr lang="ja-JP" altLang="en-US" sz="1000" b="0" dirty="0">
+              <a:rPr lang="ja-JP" altLang="en-US" sz="1100" b="0" dirty="0">
                 <a:solidFill>
                   <a:srgbClr val="444444"/>
                 </a:solidFill>
@@ -4606,16 +4230,16 @@
               <a:t>Lステップ公式サイト</a:t>
             </a:r>
             <a:r>
-              <a:rPr lang="ja-JP" altLang="en-US" sz="1000" b="0" dirty="0">
+              <a:rPr lang="ja-JP" altLang="en-US" sz="1100" b="0" dirty="0">
                 <a:solidFill>
                   <a:srgbClr val="444444"/>
                 </a:solidFill>
                 <a:latin typeface="メイリオ" panose="020B0604030504040204" pitchFamily="50" charset="-128"/>
                 <a:ea typeface="メイリオ" panose="020B0604030504040204" pitchFamily="50" charset="-128"/>
               </a:rPr>
-              <a:t>・サービス資料（ソーシャルデータバンク株式会社）</a:t>
-            </a:r>
-            <a:endParaRPr lang="ja-JP" altLang="en-US" sz="1000" dirty="0"/>
+              <a:t>・サービス資料</a:t>
+            </a:r>
+            <a:endParaRPr lang="ja-JP" altLang="en-US" sz="1100" dirty="0"/>
           </a:p>
         </p:txBody>
       </p:sp>

--- a/20261014_Lステップとは_機能と費用感.pptx
+++ b/20261014_Lステップとは_機能と費用感.pptx
@@ -2880,7 +2880,7 @@
         </p:nvSpPr>
         <p:spPr>
           <a:xfrm>
-            <a:off x="429768" y="1481328"/>
+            <a:off x="429768" y="1499616"/>
             <a:ext cx="1005840" cy="292608"/>
           </a:xfrm>
           <a:prstGeom prst="roundRect">
@@ -2928,7 +2928,7 @@
         </p:nvSpPr>
         <p:spPr>
           <a:xfrm>
-            <a:off x="1527048" y="1481328"/>
+            <a:off x="1527048" y="1499616"/>
             <a:ext cx="7827264" cy="292608"/>
           </a:xfrm>
           <a:prstGeom prst="rect">
@@ -2956,7 +2956,7 @@
                 <a:latin typeface="メイリオ" panose="020B0604030504040204" pitchFamily="50" charset="-128"/>
                 <a:ea typeface="メイリオ" panose="020B0604030504040204" pitchFamily="50" charset="-128"/>
               </a:rPr>
-              <a:t>Lステップの3つの特徴</a:t>
+              <a:t>Lステップの3つの特徴｜配信の自動化・顧客管理・効果分析</a:t>
             </a:r>
             <a:endParaRPr lang="ja-JP" altLang="en-US" sz="1300" dirty="0"/>
           </a:p>
@@ -2970,12 +2970,12 @@
         </p:nvSpPr>
         <p:spPr>
           <a:xfrm>
-            <a:off x="429768" y="1810512"/>
-            <a:ext cx="2788920" cy="402336"/>
+            <a:off x="429768" y="1847088"/>
+            <a:ext cx="2788920" cy="566928"/>
           </a:xfrm>
           <a:prstGeom prst="roundRect">
             <a:avLst>
-              <a:gd name="adj" fmla="val 14000"/>
+              <a:gd name="adj" fmla="val 12000"/>
             </a:avLst>
           </a:prstGeom>
           <a:solidFill>
@@ -2988,7 +2988,7 @@
           </a:ln>
         </p:spPr>
         <p:txBody>
-          <a:bodyPr wrap="square" lIns="146304" tIns="27432" rIns="91440" bIns="27432" rtlCol="0" anchor="ctr">
+          <a:bodyPr wrap="square" lIns="128016" tIns="27432" rIns="91440" bIns="27432" rtlCol="0" anchor="ctr">
             <a:noAutofit/>
           </a:bodyPr>
           <a:lstStyle/>
@@ -2997,7 +2997,7 @@
               <a:buNone/>
             </a:pPr>
             <a:r>
-              <a:rPr lang="ja-JP" altLang="en-US" sz="1600" b="1" dirty="0">
+              <a:rPr lang="ja-JP" altLang="en-US" sz="1400" b="1" dirty="0">
                 <a:solidFill>
                   <a:srgbClr val="FFFFFF"/>
                 </a:solidFill>
@@ -3006,7 +3006,23 @@
               </a:rPr>
               <a:t>① 配信を自動化</a:t>
             </a:r>
-            <a:endParaRPr lang="ja-JP" altLang="en-US" sz="1600" dirty="0"/>
+            <a:endParaRPr lang="ja-JP" altLang="en-US" sz="1400" dirty="0"/>
+          </a:p>
+          <a:p>
+            <a:pPr algn="l">
+              <a:buNone/>
+            </a:pPr>
+            <a:r>
+              <a:rPr lang="ja-JP" altLang="en-US" sz="1050" b="0" dirty="0">
+                <a:solidFill>
+                  <a:srgbClr val="FFFFFF"/>
+                </a:solidFill>
+                <a:latin typeface="メイリオ" panose="020B0604030504040204" pitchFamily="50" charset="-128"/>
+                <a:ea typeface="メイリオ" panose="020B0604030504040204" pitchFamily="50" charset="-128"/>
+              </a:rPr>
+              <a:t>お客様の行動に合わせて自動で届ける</a:t>
+            </a:r>
+            <a:endParaRPr lang="ja-JP" altLang="en-US" sz="1400" dirty="0"/>
           </a:p>
         </p:txBody>
       </p:sp>
@@ -3018,7 +3034,7 @@
         </p:nvSpPr>
         <p:spPr>
           <a:xfrm>
-            <a:off x="429768" y="2249424"/>
+            <a:off x="429768" y="2450592"/>
             <a:ext cx="2788920" cy="1280160"/>
           </a:xfrm>
           <a:prstGeom prst="roundRect">
@@ -3036,7 +3052,7 @@
           </a:ln>
         </p:spPr>
         <p:txBody>
-          <a:bodyPr wrap="square" lIns="146304" tIns="82296" rIns="73152" bIns="36576" rtlCol="0" anchor="t">
+          <a:bodyPr wrap="square" lIns="109728" tIns="82296" rIns="73152" bIns="36576" rtlCol="0" anchor="t">
             <a:noAutofit/>
           </a:bodyPr>
           <a:lstStyle/>
@@ -3048,16 +3064,26 @@
               <a:buNone/>
             </a:pPr>
             <a:r>
-              <a:rPr lang="ja-JP" altLang="en-US" sz="1200" b="1" dirty="0">
+              <a:rPr lang="ja-JP" altLang="en-US" sz="1100" b="1" dirty="0">
                 <a:solidFill>
                   <a:srgbClr val="1F285A"/>
                 </a:solidFill>
                 <a:latin typeface="メイリオ" panose="020B0604030504040204" pitchFamily="50" charset="-128"/>
                 <a:ea typeface="メイリオ" panose="020B0604030504040204" pitchFamily="50" charset="-128"/>
               </a:rPr>
-              <a:t>行動に合わせて自動で配信</a:t>
-            </a:r>
-            <a:endParaRPr lang="ja-JP" altLang="en-US" sz="1200" dirty="0"/>
+              <a:t>・ステップ配信</a:t>
+            </a:r>
+            <a:r>
+              <a:rPr lang="ja-JP" altLang="en-US" sz="1100" b="0" dirty="0">
+                <a:solidFill>
+                  <a:srgbClr val="333333"/>
+                </a:solidFill>
+                <a:latin typeface="メイリオ" panose="020B0604030504040204" pitchFamily="50" charset="-128"/>
+                <a:ea typeface="メイリオ" panose="020B0604030504040204" pitchFamily="50" charset="-128"/>
+              </a:rPr>
+              <a:t>｜順番に自動で配信</a:t>
+            </a:r>
+            <a:endParaRPr lang="ja-JP" altLang="en-US" sz="1100" dirty="0"/>
           </a:p>
           <a:p>
             <a:pPr algn="l">
@@ -3067,54 +3093,84 @@
               <a:buNone/>
             </a:pPr>
             <a:r>
-              <a:rPr lang="ja-JP" altLang="en-US" sz="1200" b="0" dirty="0">
+              <a:rPr lang="ja-JP" altLang="en-US" sz="1100" b="1" dirty="0">
+                <a:solidFill>
+                  <a:srgbClr val="1F285A"/>
+                </a:solidFill>
+                <a:latin typeface="メイリオ" panose="020B0604030504040204" pitchFamily="50" charset="-128"/>
+                <a:ea typeface="メイリオ" panose="020B0604030504040204" pitchFamily="50" charset="-128"/>
+              </a:rPr>
+              <a:t>・セグメント配信</a:t>
+            </a:r>
+            <a:r>
+              <a:rPr lang="ja-JP" altLang="en-US" sz="1100" b="0" dirty="0">
                 <a:solidFill>
                   <a:srgbClr val="333333"/>
                 </a:solidFill>
                 <a:latin typeface="メイリオ" panose="020B0604030504040204" pitchFamily="50" charset="-128"/>
                 <a:ea typeface="メイリオ" panose="020B0604030504040204" pitchFamily="50" charset="-128"/>
               </a:rPr>
-              <a:t>・ステップ配信</a:t>
-            </a:r>
-            <a:endParaRPr lang="ja-JP" altLang="en-US" sz="1200" dirty="0"/>
+              <a:t>｜狙った方に配信</a:t>
+            </a:r>
+            <a:endParaRPr lang="ja-JP" altLang="en-US" sz="1100" dirty="0"/>
           </a:p>
           <a:p>
             <a:pPr algn="l">
               <a:spcBef>
-                <a:spcPts val="200"/>
+                <a:spcPts val="400"/>
               </a:spcBef>
               <a:buNone/>
             </a:pPr>
             <a:r>
-              <a:rPr lang="ja-JP" altLang="en-US" sz="1200" b="0" dirty="0">
+              <a:rPr lang="ja-JP" altLang="en-US" sz="1100" b="1" dirty="0">
+                <a:solidFill>
+                  <a:srgbClr val="1F285A"/>
+                </a:solidFill>
+                <a:latin typeface="メイリオ" panose="020B0604030504040204" pitchFamily="50" charset="-128"/>
+                <a:ea typeface="メイリオ" panose="020B0604030504040204" pitchFamily="50" charset="-128"/>
+              </a:rPr>
+              <a:t>・リマインダ配信</a:t>
+            </a:r>
+            <a:r>
+              <a:rPr lang="ja-JP" altLang="en-US" sz="1100" b="0" dirty="0">
                 <a:solidFill>
                   <a:srgbClr val="333333"/>
                 </a:solidFill>
                 <a:latin typeface="メイリオ" panose="020B0604030504040204" pitchFamily="50" charset="-128"/>
                 <a:ea typeface="メイリオ" panose="020B0604030504040204" pitchFamily="50" charset="-128"/>
               </a:rPr>
-              <a:t>・セグメント配信</a:t>
-            </a:r>
-            <a:endParaRPr lang="ja-JP" altLang="en-US" sz="1200" dirty="0"/>
+              <a:t>｜予約前に自動通知</a:t>
+            </a:r>
+            <a:endParaRPr lang="ja-JP" altLang="en-US" sz="1100" dirty="0"/>
           </a:p>
           <a:p>
             <a:pPr algn="l">
               <a:spcBef>
-                <a:spcPts val="200"/>
+                <a:spcPts val="400"/>
               </a:spcBef>
               <a:buNone/>
             </a:pPr>
             <a:r>
-              <a:rPr lang="ja-JP" altLang="en-US" sz="1200" b="0" dirty="0">
+              <a:rPr lang="ja-JP" altLang="en-US" sz="1100" b="1" dirty="0">
+                <a:solidFill>
+                  <a:srgbClr val="1F285A"/>
+                </a:solidFill>
+                <a:latin typeface="メイリオ" panose="020B0604030504040204" pitchFamily="50" charset="-128"/>
+                <a:ea typeface="メイリオ" panose="020B0604030504040204" pitchFamily="50" charset="-128"/>
+              </a:rPr>
+              <a:t>・自動応答</a:t>
+            </a:r>
+            <a:r>
+              <a:rPr lang="ja-JP" altLang="en-US" sz="1100" b="0" dirty="0">
                 <a:solidFill>
                   <a:srgbClr val="333333"/>
                 </a:solidFill>
                 <a:latin typeface="メイリオ" panose="020B0604030504040204" pitchFamily="50" charset="-128"/>
                 <a:ea typeface="メイリオ" panose="020B0604030504040204" pitchFamily="50" charset="-128"/>
               </a:rPr>
-              <a:t>・自動応答</a:t>
-            </a:r>
-            <a:endParaRPr lang="ja-JP" altLang="en-US" sz="1200" dirty="0"/>
+              <a:t>｜質問に自動で返信</a:t>
+            </a:r>
+            <a:endParaRPr lang="ja-JP" altLang="en-US" sz="1100" dirty="0"/>
           </a:p>
         </p:txBody>
       </p:sp>
@@ -3126,12 +3182,12 @@
         </p:nvSpPr>
         <p:spPr>
           <a:xfrm>
-            <a:off x="3497580" y="1810512"/>
-            <a:ext cx="2788920" cy="402336"/>
+            <a:off x="3497580" y="1847088"/>
+            <a:ext cx="2788920" cy="566928"/>
           </a:xfrm>
           <a:prstGeom prst="roundRect">
             <a:avLst>
-              <a:gd name="adj" fmla="val 14000"/>
+              <a:gd name="adj" fmla="val 12000"/>
             </a:avLst>
           </a:prstGeom>
           <a:solidFill>
@@ -3144,7 +3200,7 @@
           </a:ln>
         </p:spPr>
         <p:txBody>
-          <a:bodyPr wrap="square" lIns="146304" tIns="27432" rIns="91440" bIns="27432" rtlCol="0" anchor="ctr">
+          <a:bodyPr wrap="square" lIns="128016" tIns="27432" rIns="91440" bIns="27432" rtlCol="0" anchor="ctr">
             <a:noAutofit/>
           </a:bodyPr>
           <a:lstStyle/>
@@ -3153,7 +3209,7 @@
               <a:buNone/>
             </a:pPr>
             <a:r>
-              <a:rPr lang="ja-JP" altLang="en-US" sz="1600" b="1" dirty="0">
+              <a:rPr lang="ja-JP" altLang="en-US" sz="1400" b="1" dirty="0">
                 <a:solidFill>
                   <a:srgbClr val="FFFFFF"/>
                 </a:solidFill>
@@ -3162,7 +3218,23 @@
               </a:rPr>
               <a:t>② お客様を管理</a:t>
             </a:r>
-            <a:endParaRPr lang="ja-JP" altLang="en-US" sz="1600" dirty="0"/>
+            <a:endParaRPr lang="ja-JP" altLang="en-US" sz="1400" dirty="0"/>
+          </a:p>
+          <a:p>
+            <a:pPr algn="l">
+              <a:buNone/>
+            </a:pPr>
+            <a:r>
+              <a:rPr lang="ja-JP" altLang="en-US" sz="1050" b="0" dirty="0">
+                <a:solidFill>
+                  <a:srgbClr val="FFFFFF"/>
+                </a:solidFill>
+                <a:latin typeface="メイリオ" panose="020B0604030504040204" pitchFamily="50" charset="-128"/>
+                <a:ea typeface="メイリオ" panose="020B0604030504040204" pitchFamily="50" charset="-128"/>
+              </a:rPr>
+              <a:t>友だちごとの情報と対応状況を一元管理</a:t>
+            </a:r>
+            <a:endParaRPr lang="ja-JP" altLang="en-US" sz="1400" dirty="0"/>
           </a:p>
         </p:txBody>
       </p:sp>
@@ -3174,7 +3246,7 @@
         </p:nvSpPr>
         <p:spPr>
           <a:xfrm>
-            <a:off x="3497580" y="2249424"/>
+            <a:off x="3497580" y="2450592"/>
             <a:ext cx="2788920" cy="1280160"/>
           </a:xfrm>
           <a:prstGeom prst="roundRect">
@@ -3192,7 +3264,7 @@
           </a:ln>
         </p:spPr>
         <p:txBody>
-          <a:bodyPr wrap="square" lIns="146304" tIns="82296" rIns="73152" bIns="36576" rtlCol="0" anchor="t">
+          <a:bodyPr wrap="square" lIns="109728" tIns="82296" rIns="73152" bIns="36576" rtlCol="0" anchor="t">
             <a:noAutofit/>
           </a:bodyPr>
           <a:lstStyle/>
@@ -3204,16 +3276,26 @@
               <a:buNone/>
             </a:pPr>
             <a:r>
-              <a:rPr lang="ja-JP" altLang="en-US" sz="1200" b="1" dirty="0">
+              <a:rPr lang="ja-JP" altLang="en-US" sz="1100" b="1" dirty="0">
                 <a:solidFill>
                   <a:srgbClr val="1F285A"/>
                 </a:solidFill>
                 <a:latin typeface="メイリオ" panose="020B0604030504040204" pitchFamily="50" charset="-128"/>
                 <a:ea typeface="メイリオ" panose="020B0604030504040204" pitchFamily="50" charset="-128"/>
               </a:rPr>
-              <a:t>情報と対応状況をまとめて管理</a:t>
-            </a:r>
-            <a:endParaRPr lang="ja-JP" altLang="en-US" sz="1200" dirty="0"/>
+              <a:t>・友だち情報</a:t>
+            </a:r>
+            <a:r>
+              <a:rPr lang="ja-JP" altLang="en-US" sz="1100" b="0" dirty="0">
+                <a:solidFill>
+                  <a:srgbClr val="333333"/>
+                </a:solidFill>
+                <a:latin typeface="メイリオ" panose="020B0604030504040204" pitchFamily="50" charset="-128"/>
+                <a:ea typeface="メイリオ" panose="020B0604030504040204" pitchFamily="50" charset="-128"/>
+              </a:rPr>
+              <a:t>｜属性や行動を記録</a:t>
+            </a:r>
+            <a:endParaRPr lang="ja-JP" altLang="en-US" sz="1100" dirty="0"/>
           </a:p>
           <a:p>
             <a:pPr algn="l">
@@ -3223,54 +3305,84 @@
               <a:buNone/>
             </a:pPr>
             <a:r>
-              <a:rPr lang="ja-JP" altLang="en-US" sz="1200" b="0" dirty="0">
+              <a:rPr lang="ja-JP" altLang="en-US" sz="1100" b="1" dirty="0">
+                <a:solidFill>
+                  <a:srgbClr val="1F285A"/>
+                </a:solidFill>
+                <a:latin typeface="メイリオ" panose="020B0604030504040204" pitchFamily="50" charset="-128"/>
+                <a:ea typeface="メイリオ" panose="020B0604030504040204" pitchFamily="50" charset="-128"/>
+              </a:rPr>
+              <a:t>・個別トーク</a:t>
+            </a:r>
+            <a:r>
+              <a:rPr lang="ja-JP" altLang="en-US" sz="1100" b="0" dirty="0">
                 <a:solidFill>
                   <a:srgbClr val="333333"/>
                 </a:solidFill>
                 <a:latin typeface="メイリオ" panose="020B0604030504040204" pitchFamily="50" charset="-128"/>
                 <a:ea typeface="メイリオ" panose="020B0604030504040204" pitchFamily="50" charset="-128"/>
               </a:rPr>
-              <a:t>・友だち情報</a:t>
-            </a:r>
-            <a:endParaRPr lang="ja-JP" altLang="en-US" sz="1200" dirty="0"/>
+              <a:t>｜1対1でチャット対応</a:t>
+            </a:r>
+            <a:endParaRPr lang="ja-JP" altLang="en-US" sz="1100" dirty="0"/>
           </a:p>
           <a:p>
             <a:pPr algn="l">
               <a:spcBef>
-                <a:spcPts val="200"/>
+                <a:spcPts val="400"/>
               </a:spcBef>
               <a:buNone/>
             </a:pPr>
             <a:r>
-              <a:rPr lang="ja-JP" altLang="en-US" sz="1200" b="0" dirty="0">
+              <a:rPr lang="ja-JP" altLang="en-US" sz="1100" b="1" dirty="0">
+                <a:solidFill>
+                  <a:srgbClr val="1F285A"/>
+                </a:solidFill>
+                <a:latin typeface="メイリオ" panose="020B0604030504040204" pitchFamily="50" charset="-128"/>
+                <a:ea typeface="メイリオ" panose="020B0604030504040204" pitchFamily="50" charset="-128"/>
+              </a:rPr>
+              <a:t>・回答フォーム</a:t>
+            </a:r>
+            <a:r>
+              <a:rPr lang="ja-JP" altLang="en-US" sz="1100" b="0" dirty="0">
                 <a:solidFill>
                   <a:srgbClr val="333333"/>
                 </a:solidFill>
                 <a:latin typeface="メイリオ" panose="020B0604030504040204" pitchFamily="50" charset="-128"/>
                 <a:ea typeface="メイリオ" panose="020B0604030504040204" pitchFamily="50" charset="-128"/>
               </a:rPr>
-              <a:t>・個別トーク</a:t>
-            </a:r>
-            <a:endParaRPr lang="ja-JP" altLang="en-US" sz="1200" dirty="0"/>
+              <a:t>｜アンケート・申込受付</a:t>
+            </a:r>
+            <a:endParaRPr lang="ja-JP" altLang="en-US" sz="1100" dirty="0"/>
           </a:p>
           <a:p>
             <a:pPr algn="l">
               <a:spcBef>
-                <a:spcPts val="200"/>
+                <a:spcPts val="400"/>
               </a:spcBef>
               <a:buNone/>
             </a:pPr>
             <a:r>
-              <a:rPr lang="ja-JP" altLang="en-US" sz="1200" b="0" dirty="0">
+              <a:rPr lang="ja-JP" altLang="en-US" sz="1100" b="1" dirty="0">
+                <a:solidFill>
+                  <a:srgbClr val="1F285A"/>
+                </a:solidFill>
+                <a:latin typeface="メイリオ" panose="020B0604030504040204" pitchFamily="50" charset="-128"/>
+                <a:ea typeface="メイリオ" panose="020B0604030504040204" pitchFamily="50" charset="-128"/>
+              </a:rPr>
+              <a:t>・予約管理</a:t>
+            </a:r>
+            <a:r>
+              <a:rPr lang="ja-JP" altLang="en-US" sz="1100" b="0" dirty="0">
                 <a:solidFill>
                   <a:srgbClr val="333333"/>
                 </a:solidFill>
                 <a:latin typeface="メイリオ" panose="020B0604030504040204" pitchFamily="50" charset="-128"/>
                 <a:ea typeface="メイリオ" panose="020B0604030504040204" pitchFamily="50" charset="-128"/>
               </a:rPr>
-              <a:t>・予約管理</a:t>
-            </a:r>
-            <a:endParaRPr lang="ja-JP" altLang="en-US" sz="1200" dirty="0"/>
+              <a:t>｜LINEで予約を受付</a:t>
+            </a:r>
+            <a:endParaRPr lang="ja-JP" altLang="en-US" sz="1100" dirty="0"/>
           </a:p>
         </p:txBody>
       </p:sp>
@@ -3282,12 +3394,12 @@
         </p:nvSpPr>
         <p:spPr>
           <a:xfrm>
-            <a:off x="6565392" y="1810512"/>
-            <a:ext cx="2788920" cy="402336"/>
+            <a:off x="6565392" y="1847088"/>
+            <a:ext cx="2788920" cy="566928"/>
           </a:xfrm>
           <a:prstGeom prst="roundRect">
             <a:avLst>
-              <a:gd name="adj" fmla="val 14000"/>
+              <a:gd name="adj" fmla="val 12000"/>
             </a:avLst>
           </a:prstGeom>
           <a:solidFill>
@@ -3300,7 +3412,7 @@
           </a:ln>
         </p:spPr>
         <p:txBody>
-          <a:bodyPr wrap="square" lIns="146304" tIns="27432" rIns="91440" bIns="27432" rtlCol="0" anchor="ctr">
+          <a:bodyPr wrap="square" lIns="128016" tIns="27432" rIns="91440" bIns="27432" rtlCol="0" anchor="ctr">
             <a:noAutofit/>
           </a:bodyPr>
           <a:lstStyle/>
@@ -3309,7 +3421,7 @@
               <a:buNone/>
             </a:pPr>
             <a:r>
-              <a:rPr lang="ja-JP" altLang="en-US" sz="1600" b="1" dirty="0">
+              <a:rPr lang="ja-JP" altLang="en-US" sz="1400" b="1" dirty="0">
                 <a:solidFill>
                   <a:srgbClr val="FFFFFF"/>
                 </a:solidFill>
@@ -3318,7 +3430,23 @@
               </a:rPr>
               <a:t>③ 効果を分析</a:t>
             </a:r>
-            <a:endParaRPr lang="ja-JP" altLang="en-US" sz="1600" dirty="0"/>
+            <a:endParaRPr lang="ja-JP" altLang="en-US" sz="1400" dirty="0"/>
+          </a:p>
+          <a:p>
+            <a:pPr algn="l">
+              <a:buNone/>
+            </a:pPr>
+            <a:r>
+              <a:rPr lang="ja-JP" altLang="en-US" sz="1050" b="0" dirty="0">
+                <a:solidFill>
+                  <a:srgbClr val="FFFFFF"/>
+                </a:solidFill>
+                <a:latin typeface="メイリオ" panose="020B0604030504040204" pitchFamily="50" charset="-128"/>
+                <a:ea typeface="メイリオ" panose="020B0604030504040204" pitchFamily="50" charset="-128"/>
+              </a:rPr>
+              <a:t>どこから来て何に反応したかを把握</a:t>
+            </a:r>
+            <a:endParaRPr lang="ja-JP" altLang="en-US" sz="1400" dirty="0"/>
           </a:p>
         </p:txBody>
       </p:sp>
@@ -3330,7 +3458,7 @@
         </p:nvSpPr>
         <p:spPr>
           <a:xfrm>
-            <a:off x="6565392" y="2249424"/>
+            <a:off x="6565392" y="2450592"/>
             <a:ext cx="2788920" cy="1280160"/>
           </a:xfrm>
           <a:prstGeom prst="roundRect">
@@ -3348,7 +3476,7 @@
           </a:ln>
         </p:spPr>
         <p:txBody>
-          <a:bodyPr wrap="square" lIns="146304" tIns="82296" rIns="73152" bIns="36576" rtlCol="0" anchor="t">
+          <a:bodyPr wrap="square" lIns="109728" tIns="82296" rIns="73152" bIns="36576" rtlCol="0" anchor="t">
             <a:noAutofit/>
           </a:bodyPr>
           <a:lstStyle/>
@@ -3360,16 +3488,26 @@
               <a:buNone/>
             </a:pPr>
             <a:r>
-              <a:rPr lang="ja-JP" altLang="en-US" sz="1200" b="1" dirty="0">
+              <a:rPr lang="ja-JP" altLang="en-US" sz="1100" b="1" dirty="0">
                 <a:solidFill>
                   <a:srgbClr val="1F285A"/>
                 </a:solidFill>
                 <a:latin typeface="メイリオ" panose="020B0604030504040204" pitchFamily="50" charset="-128"/>
                 <a:ea typeface="メイリオ" panose="020B0604030504040204" pitchFamily="50" charset="-128"/>
               </a:rPr>
-              <a:t>来た経路と反応を数字で把握</a:t>
-            </a:r>
-            <a:endParaRPr lang="ja-JP" altLang="en-US" sz="1200" dirty="0"/>
+              <a:t>・流入経路分析</a:t>
+            </a:r>
+            <a:r>
+              <a:rPr lang="ja-JP" altLang="en-US" sz="1100" b="0" dirty="0">
+                <a:solidFill>
+                  <a:srgbClr val="333333"/>
+                </a:solidFill>
+                <a:latin typeface="メイリオ" panose="020B0604030504040204" pitchFamily="50" charset="-128"/>
+                <a:ea typeface="メイリオ" panose="020B0604030504040204" pitchFamily="50" charset="-128"/>
+              </a:rPr>
+              <a:t>｜どこから追加したか</a:t>
+            </a:r>
+            <a:endParaRPr lang="ja-JP" altLang="en-US" sz="1100" dirty="0"/>
           </a:p>
           <a:p>
             <a:pPr algn="l">
@@ -3379,54 +3517,84 @@
               <a:buNone/>
             </a:pPr>
             <a:r>
-              <a:rPr lang="ja-JP" altLang="en-US" sz="1200" b="0" dirty="0">
+              <a:rPr lang="ja-JP" altLang="en-US" sz="1100" b="1" dirty="0">
+                <a:solidFill>
+                  <a:srgbClr val="1F285A"/>
+                </a:solidFill>
+                <a:latin typeface="メイリオ" panose="020B0604030504040204" pitchFamily="50" charset="-128"/>
+                <a:ea typeface="メイリオ" panose="020B0604030504040204" pitchFamily="50" charset="-128"/>
+              </a:rPr>
+              <a:t>・URLクリック測定</a:t>
+            </a:r>
+            <a:r>
+              <a:rPr lang="ja-JP" altLang="en-US" sz="1100" b="0" dirty="0">
                 <a:solidFill>
                   <a:srgbClr val="333333"/>
                 </a:solidFill>
                 <a:latin typeface="メイリオ" panose="020B0604030504040204" pitchFamily="50" charset="-128"/>
                 <a:ea typeface="メイリオ" panose="020B0604030504040204" pitchFamily="50" charset="-128"/>
               </a:rPr>
-              <a:t>・流入経路分析</a:t>
-            </a:r>
-            <a:endParaRPr lang="ja-JP" altLang="en-US" sz="1200" dirty="0"/>
+              <a:t>｜誰が押したか</a:t>
+            </a:r>
+            <a:endParaRPr lang="ja-JP" altLang="en-US" sz="1100" dirty="0"/>
           </a:p>
           <a:p>
             <a:pPr algn="l">
               <a:spcBef>
-                <a:spcPts val="200"/>
+                <a:spcPts val="400"/>
               </a:spcBef>
               <a:buNone/>
             </a:pPr>
             <a:r>
-              <a:rPr lang="ja-JP" altLang="en-US" sz="1200" b="0" dirty="0">
+              <a:rPr lang="ja-JP" altLang="en-US" sz="1100" b="1" dirty="0">
+                <a:solidFill>
+                  <a:srgbClr val="1F285A"/>
+                </a:solidFill>
+                <a:latin typeface="メイリオ" panose="020B0604030504040204" pitchFamily="50" charset="-128"/>
+                <a:ea typeface="メイリオ" panose="020B0604030504040204" pitchFamily="50" charset="-128"/>
+              </a:rPr>
+              <a:t>・ファネル分析</a:t>
+            </a:r>
+            <a:r>
+              <a:rPr lang="ja-JP" altLang="en-US" sz="1100" b="0" dirty="0">
                 <a:solidFill>
                   <a:srgbClr val="333333"/>
                 </a:solidFill>
                 <a:latin typeface="メイリオ" panose="020B0604030504040204" pitchFamily="50" charset="-128"/>
                 <a:ea typeface="メイリオ" panose="020B0604030504040204" pitchFamily="50" charset="-128"/>
               </a:rPr>
-              <a:t>・クリック測定</a:t>
-            </a:r>
-            <a:endParaRPr lang="ja-JP" altLang="en-US" sz="1200" dirty="0"/>
+              <a:t>｜離脱ポイントを把握</a:t>
+            </a:r>
+            <a:endParaRPr lang="ja-JP" altLang="en-US" sz="1100" dirty="0"/>
           </a:p>
           <a:p>
             <a:pPr algn="l">
               <a:spcBef>
-                <a:spcPts val="200"/>
+                <a:spcPts val="400"/>
               </a:spcBef>
               <a:buNone/>
             </a:pPr>
             <a:r>
-              <a:rPr lang="ja-JP" altLang="en-US" sz="1200" b="0" dirty="0">
+              <a:rPr lang="ja-JP" altLang="en-US" sz="1100" b="1" dirty="0">
+                <a:solidFill>
+                  <a:srgbClr val="1F285A"/>
+                </a:solidFill>
+                <a:latin typeface="メイリオ" panose="020B0604030504040204" pitchFamily="50" charset="-128"/>
+                <a:ea typeface="メイリオ" panose="020B0604030504040204" pitchFamily="50" charset="-128"/>
+              </a:rPr>
+              <a:t>・行動スコアリング</a:t>
+            </a:r>
+            <a:r>
+              <a:rPr lang="ja-JP" altLang="en-US" sz="1100" b="0" dirty="0">
                 <a:solidFill>
                   <a:srgbClr val="333333"/>
                 </a:solidFill>
                 <a:latin typeface="メイリオ" panose="020B0604030504040204" pitchFamily="50" charset="-128"/>
                 <a:ea typeface="メイリオ" panose="020B0604030504040204" pitchFamily="50" charset="-128"/>
               </a:rPr>
-              <a:t>・ファネル分析</a:t>
-            </a:r>
-            <a:endParaRPr lang="ja-JP" altLang="en-US" sz="1200" dirty="0"/>
+              <a:t>｜関心度を点数化</a:t>
+            </a:r>
+            <a:endParaRPr lang="ja-JP" altLang="en-US" sz="1100" dirty="0"/>
           </a:p>
         </p:txBody>
       </p:sp>
@@ -3438,7 +3606,7 @@
         </p:nvSpPr>
         <p:spPr>
           <a:xfrm>
-            <a:off x="429768" y="3639312"/>
+            <a:off x="429768" y="4023360"/>
             <a:ext cx="1005840" cy="292608"/>
           </a:xfrm>
           <a:prstGeom prst="roundRect">
@@ -3486,7 +3654,7 @@
         </p:nvSpPr>
         <p:spPr>
           <a:xfrm>
-            <a:off x="1527048" y="3639312"/>
+            <a:off x="1527048" y="4023360"/>
             <a:ext cx="7827264" cy="292608"/>
           </a:xfrm>
           <a:prstGeom prst="rect">
@@ -3528,8 +3696,8 @@
         </p:nvSpPr>
         <p:spPr>
           <a:xfrm>
-            <a:off x="429768" y="3968496"/>
-            <a:ext cx="2135124" cy="347472"/>
+            <a:off x="429768" y="4370832"/>
+            <a:ext cx="1691640" cy="292608"/>
           </a:xfrm>
           <a:prstGeom prst="roundRect">
             <a:avLst>
@@ -3546,7 +3714,7 @@
           </a:ln>
         </p:spPr>
         <p:txBody>
-          <a:bodyPr wrap="square" lIns="45720" tIns="18288" rIns="45720" bIns="18288" rtlCol="0" anchor="ctr">
+          <a:bodyPr wrap="square" lIns="36576" tIns="18288" rIns="36576" bIns="18288" rtlCol="0" anchor="ctr">
             <a:noAutofit/>
           </a:bodyPr>
           <a:lstStyle/>
@@ -3555,7 +3723,7 @@
               <a:buNone/>
             </a:pPr>
             <a:r>
-              <a:rPr lang="ja-JP" altLang="en-US" sz="1400" b="1" dirty="0">
+              <a:rPr lang="ja-JP" altLang="en-US" sz="1250" b="1" dirty="0">
                 <a:solidFill>
                   <a:srgbClr val="FFFFFF"/>
                 </a:solidFill>
@@ -3564,7 +3732,7 @@
               </a:rPr>
               <a:t>フリープラン</a:t>
             </a:r>
-            <a:endParaRPr lang="ja-JP" altLang="en-US" sz="1400" dirty="0"/>
+            <a:endParaRPr lang="ja-JP" altLang="en-US" sz="1250" dirty="0"/>
           </a:p>
         </p:txBody>
       </p:sp>
@@ -3576,12 +3744,12 @@
         </p:nvSpPr>
         <p:spPr>
           <a:xfrm>
-            <a:off x="429768" y="4352544"/>
-            <a:ext cx="2135124" cy="1170432"/>
+            <a:off x="429768" y="4700016"/>
+            <a:ext cx="1691640" cy="786384"/>
           </a:xfrm>
           <a:prstGeom prst="roundRect">
             <a:avLst>
-              <a:gd name="adj" fmla="val 6000"/>
+              <a:gd name="adj" fmla="val 8000"/>
             </a:avLst>
           </a:prstGeom>
           <a:solidFill>
@@ -3594,7 +3762,7 @@
           </a:ln>
         </p:spPr>
         <p:txBody>
-          <a:bodyPr wrap="square" lIns="73152" tIns="45720" rIns="73152" bIns="36576" rtlCol="0" anchor="t">
+          <a:bodyPr wrap="square" lIns="54864" tIns="64008" rIns="54864" bIns="36576" rtlCol="0" anchor="t">
             <a:noAutofit/>
           </a:bodyPr>
           <a:lstStyle/>
@@ -3606,7 +3774,7 @@
               <a:buNone/>
             </a:pPr>
             <a:r>
-              <a:rPr lang="ja-JP" altLang="en-US" sz="2600" b="1" dirty="0">
+              <a:rPr lang="ja-JP" altLang="en-US" sz="2000" b="1" dirty="0">
                 <a:solidFill>
                   <a:srgbClr val="1F285A"/>
                 </a:solidFill>
@@ -3616,7 +3784,7 @@
               <a:t>0</a:t>
             </a:r>
             <a:r>
-              <a:rPr lang="ja-JP" altLang="en-US" sz="1500" b="1" dirty="0">
+              <a:rPr lang="ja-JP" altLang="en-US" sz="1200" b="1" dirty="0">
                 <a:solidFill>
                   <a:srgbClr val="1F285A"/>
                 </a:solidFill>
@@ -3626,7 +3794,7 @@
               <a:t>円</a:t>
             </a:r>
             <a:r>
-              <a:rPr lang="ja-JP" altLang="en-US" sz="1100" b="0" dirty="0">
+              <a:rPr lang="ja-JP" altLang="en-US" sz="1050" b="0" dirty="0">
                 <a:solidFill>
                   <a:srgbClr val="5A6378"/>
                 </a:solidFill>
@@ -3635,17 +3803,17 @@
               </a:rPr>
               <a:t>／月</a:t>
             </a:r>
-            <a:endParaRPr lang="ja-JP" altLang="en-US" sz="1200" dirty="0"/>
+            <a:endParaRPr lang="ja-JP" altLang="en-US" sz="1150" dirty="0"/>
           </a:p>
           <a:p>
             <a:pPr algn="ctr">
               <a:spcBef>
-                <a:spcPts val="0"/>
+                <a:spcPts val="200"/>
               </a:spcBef>
               <a:buNone/>
             </a:pPr>
             <a:r>
-              <a:rPr lang="ja-JP" altLang="en-US" sz="1200" b="1" dirty="0">
+              <a:rPr lang="ja-JP" altLang="en-US" sz="1150" b="1" dirty="0">
                 <a:solidFill>
                   <a:srgbClr val="333333"/>
                 </a:solidFill>
@@ -3654,26 +3822,7 @@
               </a:rPr>
               <a:t>月200通まで</a:t>
             </a:r>
-            <a:endParaRPr lang="ja-JP" altLang="en-US" sz="1200" dirty="0"/>
-          </a:p>
-          <a:p>
-            <a:pPr algn="ctr">
-              <a:spcBef>
-                <a:spcPts val="300"/>
-              </a:spcBef>
-              <a:buNone/>
-            </a:pPr>
-            <a:r>
-              <a:rPr lang="ja-JP" altLang="en-US" sz="1100" b="0" dirty="0">
-                <a:solidFill>
-                  <a:srgbClr val="5A6378"/>
-                </a:solidFill>
-                <a:latin typeface="メイリオ" panose="020B0604030504040204" pitchFamily="50" charset="-128"/>
-                <a:ea typeface="メイリオ" panose="020B0604030504040204" pitchFamily="50" charset="-128"/>
-              </a:rPr>
-              <a:t>まずはお試し</a:t>
-            </a:r>
-            <a:endParaRPr lang="ja-JP" altLang="en-US" sz="1200" dirty="0"/>
+            <a:endParaRPr lang="ja-JP" altLang="en-US" sz="1150" dirty="0"/>
           </a:p>
         </p:txBody>
       </p:sp>
@@ -3685,8 +3834,8 @@
         </p:nvSpPr>
         <p:spPr>
           <a:xfrm>
-            <a:off x="2692908" y="3968496"/>
-            <a:ext cx="2135124" cy="347472"/>
+            <a:off x="2231136" y="4370832"/>
+            <a:ext cx="1691640" cy="292608"/>
           </a:xfrm>
           <a:prstGeom prst="roundRect">
             <a:avLst>
@@ -3703,7 +3852,7 @@
           </a:ln>
         </p:spPr>
         <p:txBody>
-          <a:bodyPr wrap="square" lIns="45720" tIns="18288" rIns="45720" bIns="18288" rtlCol="0" anchor="ctr">
+          <a:bodyPr wrap="square" lIns="36576" tIns="18288" rIns="36576" bIns="18288" rtlCol="0" anchor="ctr">
             <a:noAutofit/>
           </a:bodyPr>
           <a:lstStyle/>
@@ -3712,7 +3861,7 @@
               <a:buNone/>
             </a:pPr>
             <a:r>
-              <a:rPr lang="ja-JP" altLang="en-US" sz="1400" b="1" dirty="0">
+              <a:rPr lang="ja-JP" altLang="en-US" sz="1250" b="1" dirty="0">
                 <a:solidFill>
                   <a:srgbClr val="FFFFFF"/>
                 </a:solidFill>
@@ -3721,7 +3870,7 @@
               </a:rPr>
               <a:t>スタートプラン</a:t>
             </a:r>
-            <a:endParaRPr lang="ja-JP" altLang="en-US" sz="1400" dirty="0"/>
+            <a:endParaRPr lang="ja-JP" altLang="en-US" sz="1250" dirty="0"/>
           </a:p>
         </p:txBody>
       </p:sp>
@@ -3733,12 +3882,12 @@
         </p:nvSpPr>
         <p:spPr>
           <a:xfrm>
-            <a:off x="2692908" y="4352544"/>
-            <a:ext cx="2135124" cy="1170432"/>
+            <a:off x="2231136" y="4700016"/>
+            <a:ext cx="1691640" cy="786384"/>
           </a:xfrm>
           <a:prstGeom prst="roundRect">
             <a:avLst>
-              <a:gd name="adj" fmla="val 6000"/>
+              <a:gd name="adj" fmla="val 8000"/>
             </a:avLst>
           </a:prstGeom>
           <a:solidFill>
@@ -3751,7 +3900,7 @@
           </a:ln>
         </p:spPr>
         <p:txBody>
-          <a:bodyPr wrap="square" lIns="73152" tIns="45720" rIns="73152" bIns="36576" rtlCol="0" anchor="t">
+          <a:bodyPr wrap="square" lIns="54864" tIns="64008" rIns="54864" bIns="36576" rtlCol="0" anchor="t">
             <a:noAutofit/>
           </a:bodyPr>
           <a:lstStyle/>
@@ -3763,7 +3912,7 @@
               <a:buNone/>
             </a:pPr>
             <a:r>
-              <a:rPr lang="ja-JP" altLang="en-US" sz="2600" b="1" dirty="0">
+              <a:rPr lang="ja-JP" altLang="en-US" sz="2000" b="1" dirty="0">
                 <a:solidFill>
                   <a:srgbClr val="1F285A"/>
                 </a:solidFill>
@@ -3773,7 +3922,7 @@
               <a:t>5,000</a:t>
             </a:r>
             <a:r>
-              <a:rPr lang="ja-JP" altLang="en-US" sz="1500" b="1" dirty="0">
+              <a:rPr lang="ja-JP" altLang="en-US" sz="1200" b="1" dirty="0">
                 <a:solidFill>
                   <a:srgbClr val="1F285A"/>
                 </a:solidFill>
@@ -3783,7 +3932,7 @@
               <a:t>円</a:t>
             </a:r>
             <a:r>
-              <a:rPr lang="ja-JP" altLang="en-US" sz="1100" b="0" dirty="0">
+              <a:rPr lang="ja-JP" altLang="en-US" sz="1050" b="0" dirty="0">
                 <a:solidFill>
                   <a:srgbClr val="5A6378"/>
                 </a:solidFill>
@@ -3792,17 +3941,17 @@
               </a:rPr>
               <a:t>／月</a:t>
             </a:r>
-            <a:endParaRPr lang="ja-JP" altLang="en-US" sz="1200" dirty="0"/>
+            <a:endParaRPr lang="ja-JP" altLang="en-US" sz="1150" dirty="0"/>
           </a:p>
           <a:p>
             <a:pPr algn="ctr">
               <a:spcBef>
-                <a:spcPts val="0"/>
+                <a:spcPts val="200"/>
               </a:spcBef>
               <a:buNone/>
             </a:pPr>
             <a:r>
-              <a:rPr lang="ja-JP" altLang="en-US" sz="1200" b="1" dirty="0">
+              <a:rPr lang="ja-JP" altLang="en-US" sz="1150" b="1" dirty="0">
                 <a:solidFill>
                   <a:srgbClr val="333333"/>
                 </a:solidFill>
@@ -3811,26 +3960,7 @@
               </a:rPr>
               <a:t>月5,000通まで</a:t>
             </a:r>
-            <a:endParaRPr lang="ja-JP" altLang="en-US" sz="1200" dirty="0"/>
-          </a:p>
-          <a:p>
-            <a:pPr algn="ctr">
-              <a:spcBef>
-                <a:spcPts val="300"/>
-              </a:spcBef>
-              <a:buNone/>
-            </a:pPr>
-            <a:r>
-              <a:rPr lang="ja-JP" altLang="en-US" sz="1100" b="0" dirty="0">
-                <a:solidFill>
-                  <a:srgbClr val="5A6378"/>
-                </a:solidFill>
-                <a:latin typeface="メイリオ" panose="020B0604030504040204" pitchFamily="50" charset="-128"/>
-                <a:ea typeface="メイリオ" panose="020B0604030504040204" pitchFamily="50" charset="-128"/>
-              </a:rPr>
-              <a:t>小さく始める</a:t>
-            </a:r>
-            <a:endParaRPr lang="ja-JP" altLang="en-US" sz="1200" dirty="0"/>
+            <a:endParaRPr lang="ja-JP" altLang="en-US" sz="1150" dirty="0"/>
           </a:p>
         </p:txBody>
       </p:sp>
@@ -3842,8 +3972,8 @@
         </p:nvSpPr>
         <p:spPr>
           <a:xfrm>
-            <a:off x="4956048" y="3968496"/>
-            <a:ext cx="2135124" cy="347472"/>
+            <a:off x="4032504" y="4370832"/>
+            <a:ext cx="1691640" cy="292608"/>
           </a:xfrm>
           <a:prstGeom prst="roundRect">
             <a:avLst>
@@ -3860,7 +3990,7 @@
           </a:ln>
         </p:spPr>
         <p:txBody>
-          <a:bodyPr wrap="square" lIns="45720" tIns="18288" rIns="45720" bIns="18288" rtlCol="0" anchor="ctr">
+          <a:bodyPr wrap="square" lIns="36576" tIns="18288" rIns="36576" bIns="18288" rtlCol="0" anchor="ctr">
             <a:noAutofit/>
           </a:bodyPr>
           <a:lstStyle/>
@@ -3869,7 +3999,7 @@
               <a:buNone/>
             </a:pPr>
             <a:r>
-              <a:rPr lang="ja-JP" altLang="en-US" sz="1400" b="1" dirty="0">
+              <a:rPr lang="ja-JP" altLang="en-US" sz="1250" b="1" dirty="0">
                 <a:solidFill>
                   <a:srgbClr val="FFFFFF"/>
                 </a:solidFill>
@@ -3878,7 +4008,7 @@
               </a:rPr>
               <a:t>スタンダードプラン</a:t>
             </a:r>
-            <a:endParaRPr lang="ja-JP" altLang="en-US" sz="1400" dirty="0"/>
+            <a:endParaRPr lang="ja-JP" altLang="en-US" sz="1250" dirty="0"/>
           </a:p>
         </p:txBody>
       </p:sp>
@@ -3890,12 +4020,12 @@
         </p:nvSpPr>
         <p:spPr>
           <a:xfrm>
-            <a:off x="4956048" y="4352544"/>
-            <a:ext cx="2135124" cy="1170432"/>
+            <a:off x="4032504" y="4700016"/>
+            <a:ext cx="1691640" cy="786384"/>
           </a:xfrm>
           <a:prstGeom prst="roundRect">
             <a:avLst>
-              <a:gd name="adj" fmla="val 6000"/>
+              <a:gd name="adj" fmla="val 8000"/>
             </a:avLst>
           </a:prstGeom>
           <a:solidFill>
@@ -3908,7 +4038,7 @@
           </a:ln>
         </p:spPr>
         <p:txBody>
-          <a:bodyPr wrap="square" lIns="73152" tIns="45720" rIns="73152" bIns="36576" rtlCol="0" anchor="t">
+          <a:bodyPr wrap="square" lIns="54864" tIns="64008" rIns="54864" bIns="36576" rtlCol="0" anchor="t">
             <a:noAutofit/>
           </a:bodyPr>
           <a:lstStyle/>
@@ -3920,7 +4050,7 @@
               <a:buNone/>
             </a:pPr>
             <a:r>
-              <a:rPr lang="ja-JP" altLang="en-US" sz="2600" b="1" dirty="0">
+              <a:rPr lang="ja-JP" altLang="en-US" sz="2000" b="1" dirty="0">
                 <a:solidFill>
                   <a:srgbClr val="1F285A"/>
                 </a:solidFill>
@@ -3930,7 +4060,7 @@
               <a:t>21,780</a:t>
             </a:r>
             <a:r>
-              <a:rPr lang="ja-JP" altLang="en-US" sz="1500" b="1" dirty="0">
+              <a:rPr lang="ja-JP" altLang="en-US" sz="1200" b="1" dirty="0">
                 <a:solidFill>
                   <a:srgbClr val="1F285A"/>
                 </a:solidFill>
@@ -3940,7 +4070,7 @@
               <a:t>円</a:t>
             </a:r>
             <a:r>
-              <a:rPr lang="ja-JP" altLang="en-US" sz="1100" b="0" dirty="0">
+              <a:rPr lang="ja-JP" altLang="en-US" sz="1050" b="0" dirty="0">
                 <a:solidFill>
                   <a:srgbClr val="5A6378"/>
                 </a:solidFill>
@@ -3949,17 +4079,17 @@
               </a:rPr>
               <a:t>／月</a:t>
             </a:r>
-            <a:endParaRPr lang="ja-JP" altLang="en-US" sz="1200" dirty="0"/>
+            <a:endParaRPr lang="ja-JP" altLang="en-US" sz="1150" dirty="0"/>
           </a:p>
           <a:p>
             <a:pPr algn="ctr">
               <a:spcBef>
-                <a:spcPts val="0"/>
+                <a:spcPts val="200"/>
               </a:spcBef>
               <a:buNone/>
             </a:pPr>
             <a:r>
-              <a:rPr lang="ja-JP" altLang="en-US" sz="1200" b="1" dirty="0">
+              <a:rPr lang="ja-JP" altLang="en-US" sz="1150" b="1" dirty="0">
                 <a:solidFill>
                   <a:srgbClr val="333333"/>
                 </a:solidFill>
@@ -3968,26 +4098,7 @@
               </a:rPr>
               <a:t>月30,000通まで</a:t>
             </a:r>
-            <a:endParaRPr lang="ja-JP" altLang="en-US" sz="1200" dirty="0"/>
-          </a:p>
-          <a:p>
-            <a:pPr algn="ctr">
-              <a:spcBef>
-                <a:spcPts val="300"/>
-              </a:spcBef>
-              <a:buNone/>
-            </a:pPr>
-            <a:r>
-              <a:rPr lang="ja-JP" altLang="en-US" sz="1100" b="0" dirty="0">
-                <a:solidFill>
-                  <a:srgbClr val="5A6378"/>
-                </a:solidFill>
-                <a:latin typeface="メイリオ" panose="020B0604030504040204" pitchFamily="50" charset="-128"/>
-                <a:ea typeface="メイリオ" panose="020B0604030504040204" pitchFamily="50" charset="-128"/>
-              </a:rPr>
-              <a:t>本格的に運用</a:t>
-            </a:r>
-            <a:endParaRPr lang="ja-JP" altLang="en-US" sz="1200" dirty="0"/>
+            <a:endParaRPr lang="ja-JP" altLang="en-US" sz="1150" dirty="0"/>
           </a:p>
         </p:txBody>
       </p:sp>
@@ -3999,8 +4110,8 @@
         </p:nvSpPr>
         <p:spPr>
           <a:xfrm>
-            <a:off x="7219188" y="3968496"/>
-            <a:ext cx="2135124" cy="347472"/>
+            <a:off x="5833872" y="4370832"/>
+            <a:ext cx="1691640" cy="292608"/>
           </a:xfrm>
           <a:prstGeom prst="roundRect">
             <a:avLst>
@@ -4017,7 +4128,7 @@
           </a:ln>
         </p:spPr>
         <p:txBody>
-          <a:bodyPr wrap="square" lIns="45720" tIns="18288" rIns="45720" bIns="18288" rtlCol="0" anchor="ctr">
+          <a:bodyPr wrap="square" lIns="36576" tIns="18288" rIns="36576" bIns="18288" rtlCol="0" anchor="ctr">
             <a:noAutofit/>
           </a:bodyPr>
           <a:lstStyle/>
@@ -4026,7 +4137,7 @@
               <a:buNone/>
             </a:pPr>
             <a:r>
-              <a:rPr lang="ja-JP" altLang="en-US" sz="1400" b="1" dirty="0">
+              <a:rPr lang="ja-JP" altLang="en-US" sz="1250" b="1" dirty="0">
                 <a:solidFill>
                   <a:srgbClr val="FFFFFF"/>
                 </a:solidFill>
@@ -4035,7 +4146,7 @@
               </a:rPr>
               <a:t>プロプラン</a:t>
             </a:r>
-            <a:endParaRPr lang="ja-JP" altLang="en-US" sz="1400" dirty="0"/>
+            <a:endParaRPr lang="ja-JP" altLang="en-US" sz="1250" dirty="0"/>
           </a:p>
         </p:txBody>
       </p:sp>
@@ -4047,12 +4158,12 @@
         </p:nvSpPr>
         <p:spPr>
           <a:xfrm>
-            <a:off x="7219188" y="4352544"/>
-            <a:ext cx="2135124" cy="1170432"/>
+            <a:off x="5833872" y="4700016"/>
+            <a:ext cx="1691640" cy="786384"/>
           </a:xfrm>
           <a:prstGeom prst="roundRect">
             <a:avLst>
-              <a:gd name="adj" fmla="val 6000"/>
+              <a:gd name="adj" fmla="val 8000"/>
             </a:avLst>
           </a:prstGeom>
           <a:solidFill>
@@ -4065,7 +4176,7 @@
           </a:ln>
         </p:spPr>
         <p:txBody>
-          <a:bodyPr wrap="square" lIns="73152" tIns="45720" rIns="73152" bIns="36576" rtlCol="0" anchor="t">
+          <a:bodyPr wrap="square" lIns="54864" tIns="64008" rIns="54864" bIns="36576" rtlCol="0" anchor="t">
             <a:noAutofit/>
           </a:bodyPr>
           <a:lstStyle/>
@@ -4077,7 +4188,7 @@
               <a:buNone/>
             </a:pPr>
             <a:r>
-              <a:rPr lang="ja-JP" altLang="en-US" sz="2600" b="1" dirty="0">
+              <a:rPr lang="ja-JP" altLang="en-US" sz="2000" b="1" dirty="0">
                 <a:solidFill>
                   <a:srgbClr val="1F285A"/>
                 </a:solidFill>
@@ -4087,7 +4198,7 @@
               <a:t>32,780</a:t>
             </a:r>
             <a:r>
-              <a:rPr lang="ja-JP" altLang="en-US" sz="1500" b="1" dirty="0">
+              <a:rPr lang="ja-JP" altLang="en-US" sz="1200" b="1" dirty="0">
                 <a:solidFill>
                   <a:srgbClr val="1F285A"/>
                 </a:solidFill>
@@ -4097,7 +4208,7 @@
               <a:t>円</a:t>
             </a:r>
             <a:r>
-              <a:rPr lang="ja-JP" altLang="en-US" sz="1100" b="0" dirty="0">
+              <a:rPr lang="ja-JP" altLang="en-US" sz="1050" b="0" dirty="0">
                 <a:solidFill>
                   <a:srgbClr val="5A6378"/>
                 </a:solidFill>
@@ -4106,17 +4217,17 @@
               </a:rPr>
               <a:t>／月</a:t>
             </a:r>
-            <a:endParaRPr lang="ja-JP" altLang="en-US" sz="1200" dirty="0"/>
+            <a:endParaRPr lang="ja-JP" altLang="en-US" sz="1150" dirty="0"/>
           </a:p>
           <a:p>
             <a:pPr algn="ctr">
               <a:spcBef>
-                <a:spcPts val="0"/>
+                <a:spcPts val="200"/>
               </a:spcBef>
               <a:buNone/>
             </a:pPr>
             <a:r>
-              <a:rPr lang="ja-JP" altLang="en-US" sz="1200" b="1" dirty="0">
+              <a:rPr lang="ja-JP" altLang="en-US" sz="1150" b="1" dirty="0">
                 <a:solidFill>
                   <a:srgbClr val="333333"/>
                 </a:solidFill>
@@ -4125,39 +4236,125 @@
               </a:rPr>
               <a:t>月50,000通まで</a:t>
             </a:r>
-            <a:endParaRPr lang="ja-JP" altLang="en-US" sz="1200" dirty="0"/>
-          </a:p>
-          <a:p>
-            <a:pPr algn="ctr">
-              <a:spcBef>
-                <a:spcPts val="300"/>
-              </a:spcBef>
-              <a:buNone/>
-            </a:pPr>
-            <a:r>
-              <a:rPr lang="ja-JP" altLang="en-US" sz="1100" b="0" dirty="0">
-                <a:solidFill>
-                  <a:srgbClr val="5A6378"/>
-                </a:solidFill>
-                <a:latin typeface="メイリオ" panose="020B0604030504040204" pitchFamily="50" charset="-128"/>
-                <a:ea typeface="メイリオ" panose="020B0604030504040204" pitchFamily="50" charset="-128"/>
-              </a:rPr>
-              <a:t>分析まで全機能</a:t>
-            </a:r>
-            <a:endParaRPr lang="ja-JP" altLang="en-US" sz="1200" dirty="0"/>
+            <a:endParaRPr lang="ja-JP" altLang="en-US" sz="1150" dirty="0"/>
           </a:p>
         </p:txBody>
       </p:sp>
       <p:sp>
         <p:nvSpPr>
-          <p:cNvPr id="64" name="注記・出典"/>
+          <p:cNvPr id="64" name="別途費用の注意"/>
           <p:cNvSpPr/>
           <p:nvPr/>
         </p:nvSpPr>
         <p:spPr>
           <a:xfrm>
-            <a:off x="429768" y="5614416"/>
-            <a:ext cx="8924544" cy="749808"/>
+            <a:off x="7726680" y="4370832"/>
+            <a:ext cx="1627631" cy="1115568"/>
+          </a:xfrm>
+          <a:prstGeom prst="roundRect">
+            <a:avLst>
+              <a:gd name="adj" fmla="val 8000"/>
+            </a:avLst>
+          </a:prstGeom>
+          <a:solidFill>
+            <a:srgbClr val="F5F7FA"/>
+          </a:solidFill>
+          <a:ln w="9525">
+            <a:solidFill>
+              <a:srgbClr val="D1D8E0"/>
+            </a:solidFill>
+          </a:ln>
+        </p:spPr>
+        <p:txBody>
+          <a:bodyPr wrap="square" lIns="73152" tIns="54864" rIns="73152" bIns="54864" rtlCol="0" anchor="ctr">
+            <a:noAutofit/>
+          </a:bodyPr>
+          <a:lstStyle/>
+          <a:p>
+            <a:pPr algn="ctr">
+              <a:buNone/>
+            </a:pPr>
+            <a:r>
+              <a:rPr lang="ja-JP" altLang="en-US" sz="1100" b="1" dirty="0">
+                <a:solidFill>
+                  <a:srgbClr val="1F285A"/>
+                </a:solidFill>
+                <a:latin typeface="メイリオ" panose="020B0604030504040204" pitchFamily="50" charset="-128"/>
+                <a:ea typeface="メイリオ" panose="020B0604030504040204" pitchFamily="50" charset="-128"/>
+              </a:rPr>
+              <a:t>※別途、LINE公式</a:t>
+            </a:r>
+            <a:br>
+              <a:rPr lang="ja-JP" altLang="en-US" sz="1100" b="1" dirty="0">
+                <a:solidFill>
+                  <a:srgbClr val="1F285A"/>
+                </a:solidFill>
+                <a:latin typeface="メイリオ" panose="020B0604030504040204" pitchFamily="50" charset="-128"/>
+                <a:ea typeface="メイリオ" panose="020B0604030504040204" pitchFamily="50" charset="-128"/>
+              </a:rPr>
+            </a:br>
+            <a:r>
+              <a:rPr lang="ja-JP" altLang="en-US" sz="1100" b="1" dirty="0">
+                <a:solidFill>
+                  <a:srgbClr val="1F285A"/>
+                </a:solidFill>
+                <a:latin typeface="メイリオ" panose="020B0604030504040204" pitchFamily="50" charset="-128"/>
+                <a:ea typeface="メイリオ" panose="020B0604030504040204" pitchFamily="50" charset="-128"/>
+              </a:rPr>
+              <a:t>アカウントの</a:t>
+            </a:r>
+            <a:br>
+              <a:rPr lang="ja-JP" altLang="en-US" sz="1100" b="1" dirty="0">
+                <a:solidFill>
+                  <a:srgbClr val="1F285A"/>
+                </a:solidFill>
+                <a:latin typeface="メイリオ" panose="020B0604030504040204" pitchFamily="50" charset="-128"/>
+                <a:ea typeface="メイリオ" panose="020B0604030504040204" pitchFamily="50" charset="-128"/>
+              </a:rPr>
+            </a:br>
+            <a:r>
+              <a:rPr lang="ja-JP" altLang="en-US" sz="1100" b="1" dirty="0">
+                <a:solidFill>
+                  <a:srgbClr val="1F285A"/>
+                </a:solidFill>
+                <a:latin typeface="メイリオ" panose="020B0604030504040204" pitchFamily="50" charset="-128"/>
+                <a:ea typeface="メイリオ" panose="020B0604030504040204" pitchFamily="50" charset="-128"/>
+              </a:rPr>
+              <a:t>月額費用が</a:t>
+            </a:r>
+            <a:br>
+              <a:rPr lang="ja-JP" altLang="en-US" sz="1100" b="1" dirty="0">
+                <a:solidFill>
+                  <a:srgbClr val="1F285A"/>
+                </a:solidFill>
+                <a:latin typeface="メイリオ" panose="020B0604030504040204" pitchFamily="50" charset="-128"/>
+                <a:ea typeface="メイリオ" panose="020B0604030504040204" pitchFamily="50" charset="-128"/>
+              </a:rPr>
+            </a:br>
+            <a:r>
+              <a:rPr lang="ja-JP" altLang="en-US" sz="1100" b="1" dirty="0">
+                <a:solidFill>
+                  <a:srgbClr val="1F285A"/>
+                </a:solidFill>
+                <a:latin typeface="メイリオ" panose="020B0604030504040204" pitchFamily="50" charset="-128"/>
+                <a:ea typeface="メイリオ" panose="020B0604030504040204" pitchFamily="50" charset="-128"/>
+              </a:rPr>
+              <a:t>かかります。</a:t>
+            </a:r>
+            <a:endParaRPr lang="ja-JP" altLang="en-US" sz="1100" dirty="0"/>
+          </a:p>
+        </p:txBody>
+      </p:sp>
+      <p:sp>
+        <p:nvSpPr>
+          <p:cNvPr id="65" name="注記・出典"/>
+          <p:cNvSpPr/>
+          <p:nvPr/>
+        </p:nvSpPr>
+        <p:spPr>
+          <a:xfrm>
+            <a:off x="429768" y="5650992"/>
+            <a:ext cx="8924544" cy="548640"/>
           </a:xfrm>
           <a:prstGeom prst="rect">
             <a:avLst/>
@@ -4172,22 +4369,6 @@
             <a:noAutofit/>
           </a:bodyPr>
           <a:lstStyle/>
-          <a:p>
-            <a:pPr algn="l">
-              <a:buNone/>
-            </a:pPr>
-            <a:r>
-              <a:rPr lang="ja-JP" altLang="en-US" sz="1100" b="1" dirty="0">
-                <a:solidFill>
-                  <a:srgbClr val="1F285A"/>
-                </a:solidFill>
-                <a:latin typeface="メイリオ" panose="020B0604030504040204" pitchFamily="50" charset="-128"/>
-                <a:ea typeface="メイリオ" panose="020B0604030504040204" pitchFamily="50" charset="-128"/>
-              </a:rPr>
-              <a:t>※別途、LINE公式アカウントの月額費用がかかります。</a:t>
-            </a:r>
-            <a:endParaRPr lang="ja-JP" altLang="en-US" sz="1100" dirty="0"/>
-          </a:p>
           <a:p>
             <a:pPr algn="l">
               <a:buNone/>
